--- a/public/lessons/year-6-maths/autumn/week-9/fluency-with-the-four-operations/teaching-powerpoint-v1.pptx
+++ b/public/lessons/year-6-maths/autumn/week-9/fluency-with-the-four-operations/teaching-powerpoint-v1.pptx
@@ -2,24 +2,24 @@
 <file path=ppt/presentation.xml><?xml version="1.0" encoding="utf-8"?>
 <p:presentation xmlns:p="http://schemas.openxmlformats.org/presentationml/2006/main">
   <p:sldMasterIdLst>
-    <p:sldMasterId xmlns:r="http://schemas.openxmlformats.org/officeDocument/2006/relationships" id="2147483648" r:id="Rf1923b29a6fc489a"/>
+    <p:sldMasterId xmlns:r="http://schemas.openxmlformats.org/officeDocument/2006/relationships" id="2147483648" r:id="R61caf7b132774a68"/>
   </p:sldMasterIdLst>
   <p:notesMasterIdLst>
-    <p:notesMasterId xmlns:r="http://schemas.openxmlformats.org/officeDocument/2006/relationships" r:id="Rae8cafd3882144fa"/>
+    <p:notesMasterId xmlns:r="http://schemas.openxmlformats.org/officeDocument/2006/relationships" r:id="R1f2068c88c874e74"/>
   </p:notesMasterIdLst>
   <p:sldIdLst>
-    <p:sldId xmlns:r="http://schemas.openxmlformats.org/officeDocument/2006/relationships" id="256" r:id="R27bbd128a55b4c3b"/>
-    <p:sldId xmlns:r="http://schemas.openxmlformats.org/officeDocument/2006/relationships" id="257" r:id="Reb93726d447144f2"/>
-    <p:sldId xmlns:r="http://schemas.openxmlformats.org/officeDocument/2006/relationships" id="258" r:id="Rc1b985390d704fd9"/>
-    <p:sldId xmlns:r="http://schemas.openxmlformats.org/officeDocument/2006/relationships" id="259" r:id="R480769f5e2a34cbd"/>
-    <p:sldId xmlns:r="http://schemas.openxmlformats.org/officeDocument/2006/relationships" id="260" r:id="Ra7873f7e76984f29"/>
-    <p:sldId xmlns:r="http://schemas.openxmlformats.org/officeDocument/2006/relationships" id="261" r:id="R961a81fa6cba4c61"/>
-    <p:sldId xmlns:r="http://schemas.openxmlformats.org/officeDocument/2006/relationships" id="262" r:id="R04a8dfa586f1441a"/>
-    <p:sldId xmlns:r="http://schemas.openxmlformats.org/officeDocument/2006/relationships" id="263" r:id="R8f8fdaef43654e31"/>
-    <p:sldId xmlns:r="http://schemas.openxmlformats.org/officeDocument/2006/relationships" id="264" r:id="R17168297b99e48f2"/>
-    <p:sldId xmlns:r="http://schemas.openxmlformats.org/officeDocument/2006/relationships" id="265" r:id="Raedb23f4dbf84091"/>
-    <p:sldId xmlns:r="http://schemas.openxmlformats.org/officeDocument/2006/relationships" id="266" r:id="R645ecae610c24bf7"/>
-    <p:sldId xmlns:r="http://schemas.openxmlformats.org/officeDocument/2006/relationships" id="267" r:id="R3539902d6ad64ea1"/>
+    <p:sldId xmlns:r="http://schemas.openxmlformats.org/officeDocument/2006/relationships" id="256" r:id="R63c3c172d35943ff"/>
+    <p:sldId xmlns:r="http://schemas.openxmlformats.org/officeDocument/2006/relationships" id="257" r:id="R828bb4862c11435c"/>
+    <p:sldId xmlns:r="http://schemas.openxmlformats.org/officeDocument/2006/relationships" id="258" r:id="Rc67cb19fb6f34914"/>
+    <p:sldId xmlns:r="http://schemas.openxmlformats.org/officeDocument/2006/relationships" id="259" r:id="Rfe200c010d274aec"/>
+    <p:sldId xmlns:r="http://schemas.openxmlformats.org/officeDocument/2006/relationships" id="260" r:id="Rb8200dcce4ff4bc1"/>
+    <p:sldId xmlns:r="http://schemas.openxmlformats.org/officeDocument/2006/relationships" id="261" r:id="R66b3513f00324818"/>
+    <p:sldId xmlns:r="http://schemas.openxmlformats.org/officeDocument/2006/relationships" id="262" r:id="Rbd2346ecca3e4e71"/>
+    <p:sldId xmlns:r="http://schemas.openxmlformats.org/officeDocument/2006/relationships" id="263" r:id="R4811f9dd45fb4ca6"/>
+    <p:sldId xmlns:r="http://schemas.openxmlformats.org/officeDocument/2006/relationships" id="264" r:id="R24343c811d55433b"/>
+    <p:sldId xmlns:r="http://schemas.openxmlformats.org/officeDocument/2006/relationships" id="265" r:id="R8ed0ccc65de04227"/>
+    <p:sldId xmlns:r="http://schemas.openxmlformats.org/officeDocument/2006/relationships" id="266" r:id="R70af77b2a4444cb7"/>
+    <p:sldId xmlns:r="http://schemas.openxmlformats.org/officeDocument/2006/relationships" id="267" r:id="R67955dbfc879490e"/>
   </p:sldIdLst>
   <p:sldSz cx="12192000" cy="6858000"/>
   <p:notesSz cx="6858000" cy="9144000"/>
@@ -873,7 +873,7 @@
           <a:lstStyle xmlns:a="http://schemas.openxmlformats.org/drawingml/2006/main"/>
           <a:p xmlns:a="http://schemas.openxmlformats.org/drawingml/2006/main">
             <a:r>
-              <a:t>I do. Reveal the question, setup and each calculation stage one click at a time. Pupils watch before copying. Model answer: 913,281 and 515,381.</a:t>
+              <a:t>I do. Reveal the question, then reveal each mathematical change one click at a time. Point to the numbers and operation that changed before moving to the next line. Final answer: 913,281 and 515,381.</a:t>
             </a:r>
           </a:p>
         </p:txBody>
@@ -1291,7 +1291,7 @@
   </p:cSld>
   <p:clrMap bg1="lt1" tx1="dk1" bg2="lt2" tx2="dk2" accent1="accent1" accent2="accent2" accent3="accent3" accent4="accent4" accent5="accent5" accent6="accent6" hlink="hlink" folHlink="folHlink"/>
   <p:sldLayoutIdLst>
-    <p:sldLayoutId xmlns:r="http://schemas.openxmlformats.org/officeDocument/2006/relationships" id="2147483649" r:id="Red7ceefd5f734c9e"/>
+    <p:sldLayoutId xmlns:r="http://schemas.openxmlformats.org/officeDocument/2006/relationships" id="2147483649" r:id="Rb40c59acb1894170"/>
   </p:sldLayoutIdLst>
   <p:txStyles>
     <p:titleStyle>
@@ -1842,7 +1842,7 @@
           <p:cNvPr id="12" name="">
             <a:extLst xmlns:a="http://schemas.openxmlformats.org/drawingml/2006/main">
               <a:ext uri="{FF2B5EF4-FFF2-40B4-BE49-F238E27FC236}">
-                <a16:creationId xmlns:a16="http://schemas.microsoft.com/office/drawing/2014/main" id="{D28CCDB3-0621-4E2F-80E1-F53E87C7E515}"/>
+                <a16:creationId xmlns:a16="http://schemas.microsoft.com/office/drawing/2014/main" id="{7AB40060-D5AD-48AF-BE5C-81D0B7E2065A}"/>
               </a:ext>
             </a:extLst>
           </p:cNvPr>
@@ -1874,7 +1874,7 @@
           <p:cNvPr id="2" name="">
             <a:extLst xmlns:a="http://schemas.openxmlformats.org/drawingml/2006/main">
               <a:ext uri="{FF2B5EF4-FFF2-40B4-BE49-F238E27FC236}">
-                <a16:creationId xmlns:a16="http://schemas.microsoft.com/office/drawing/2014/main" id="{1DA50449-E46B-4083-B659-5A13A2F1A46B}"/>
+                <a16:creationId xmlns:a16="http://schemas.microsoft.com/office/drawing/2014/main" id="{F09F72E4-9E90-4B76-8584-7109564EAA9F}"/>
               </a:ext>
             </a:extLst>
           </p:cNvPr>
@@ -1931,7 +1931,7 @@
           <p:cNvPr id="3" name="">
             <a:extLst xmlns:a="http://schemas.openxmlformats.org/drawingml/2006/main">
               <a:ext uri="{FF2B5EF4-FFF2-40B4-BE49-F238E27FC236}">
-                <a16:creationId xmlns:a16="http://schemas.microsoft.com/office/drawing/2014/main" id="{288BA37A-F710-4AD2-BF18-216D55B52B3F}"/>
+                <a16:creationId xmlns:a16="http://schemas.microsoft.com/office/drawing/2014/main" id="{588D5104-9B43-4E12-B6F2-46157CA4B9F6}"/>
               </a:ext>
             </a:extLst>
           </p:cNvPr>
@@ -1965,7 +1965,7 @@
           <p:cNvPr id="4" name="">
             <a:extLst xmlns:a="http://schemas.openxmlformats.org/drawingml/2006/main">
               <a:ext uri="{FF2B5EF4-FFF2-40B4-BE49-F238E27FC236}">
-                <a16:creationId xmlns:a16="http://schemas.microsoft.com/office/drawing/2014/main" id="{79167FC8-A86A-4D63-B7FA-B89C28C9F965}"/>
+                <a16:creationId xmlns:a16="http://schemas.microsoft.com/office/drawing/2014/main" id="{B949F379-BC06-41FD-956F-2FF6F5CB8C6E}"/>
               </a:ext>
             </a:extLst>
           </p:cNvPr>
@@ -2022,7 +2022,7 @@
           <p:cNvPr id="5" name="">
             <a:extLst xmlns:a="http://schemas.openxmlformats.org/drawingml/2006/main">
               <a:ext uri="{FF2B5EF4-FFF2-40B4-BE49-F238E27FC236}">
-                <a16:creationId xmlns:a16="http://schemas.microsoft.com/office/drawing/2014/main" id="{CEDCEFBC-69CA-4317-844D-10946B6208A2}"/>
+                <a16:creationId xmlns:a16="http://schemas.microsoft.com/office/drawing/2014/main" id="{D58A5430-018B-4CD7-9534-96BDD502C282}"/>
               </a:ext>
             </a:extLst>
           </p:cNvPr>
@@ -2079,7 +2079,7 @@
           <p:cNvPr id="6" name="">
             <a:extLst xmlns:a="http://schemas.openxmlformats.org/drawingml/2006/main">
               <a:ext uri="{FF2B5EF4-FFF2-40B4-BE49-F238E27FC236}">
-                <a16:creationId xmlns:a16="http://schemas.microsoft.com/office/drawing/2014/main" id="{06B12F00-D372-43B3-8098-4D0B023128FF}"/>
+                <a16:creationId xmlns:a16="http://schemas.microsoft.com/office/drawing/2014/main" id="{B4D0CE36-FDEF-45A7-B85D-1DA142660322}"/>
               </a:ext>
             </a:extLst>
           </p:cNvPr>
@@ -2113,7 +2113,7 @@
           <p:cNvPr id="7" name="">
             <a:extLst xmlns:a="http://schemas.openxmlformats.org/drawingml/2006/main">
               <a:ext uri="{FF2B5EF4-FFF2-40B4-BE49-F238E27FC236}">
-                <a16:creationId xmlns:a16="http://schemas.microsoft.com/office/drawing/2014/main" id="{78441D9B-2918-4F8C-85C7-5F660A76B85B}"/>
+                <a16:creationId xmlns:a16="http://schemas.microsoft.com/office/drawing/2014/main" id="{DEEDC059-99A9-439B-9DAA-4553BC87506A}"/>
               </a:ext>
             </a:extLst>
           </p:cNvPr>
@@ -2170,7 +2170,7 @@
           <p:cNvPr id="8" name="">
             <a:extLst xmlns:a="http://schemas.openxmlformats.org/drawingml/2006/main">
               <a:ext uri="{FF2B5EF4-FFF2-40B4-BE49-F238E27FC236}">
-                <a16:creationId xmlns:a16="http://schemas.microsoft.com/office/drawing/2014/main" id="{3F907871-BCD5-44CF-9710-0C0CBD988D63}"/>
+                <a16:creationId xmlns:a16="http://schemas.microsoft.com/office/drawing/2014/main" id="{632C79CA-B9B4-472D-8598-30EA3BE5EC76}"/>
               </a:ext>
             </a:extLst>
           </p:cNvPr>
@@ -2227,7 +2227,7 @@
           <p:cNvPr id="9" name="">
             <a:extLst xmlns:a="http://schemas.openxmlformats.org/drawingml/2006/main">
               <a:ext uri="{FF2B5EF4-FFF2-40B4-BE49-F238E27FC236}">
-                <a16:creationId xmlns:a16="http://schemas.microsoft.com/office/drawing/2014/main" id="{3E00D05C-6A33-4573-BC4A-540B15739906}"/>
+                <a16:creationId xmlns:a16="http://schemas.microsoft.com/office/drawing/2014/main" id="{39AC9F00-87BB-45A3-BD13-ED9234B7EC89}"/>
               </a:ext>
             </a:extLst>
           </p:cNvPr>
@@ -2284,7 +2284,7 @@
           <p:cNvPr id="10" name="">
             <a:extLst xmlns:a="http://schemas.openxmlformats.org/drawingml/2006/main">
               <a:ext uri="{FF2B5EF4-FFF2-40B4-BE49-F238E27FC236}">
-                <a16:creationId xmlns:a16="http://schemas.microsoft.com/office/drawing/2014/main" id="{BB698005-57D5-4B64-B6B7-FC5F064EF6A2}"/>
+                <a16:creationId xmlns:a16="http://schemas.microsoft.com/office/drawing/2014/main" id="{00D2D91D-364A-495D-88A4-0290955751F8}"/>
               </a:ext>
             </a:extLst>
           </p:cNvPr>
@@ -2341,7 +2341,7 @@
           <p:cNvPr id="11" name="">
             <a:extLst xmlns:a="http://schemas.openxmlformats.org/drawingml/2006/main">
               <a:ext uri="{FF2B5EF4-FFF2-40B4-BE49-F238E27FC236}">
-                <a16:creationId xmlns:a16="http://schemas.microsoft.com/office/drawing/2014/main" id="{DFBBE890-D358-47CF-8579-AADA2CE34CA6}"/>
+                <a16:creationId xmlns:a16="http://schemas.microsoft.com/office/drawing/2014/main" id="{C3D3528B-C01B-4DF3-B763-640D248FA99E}"/>
               </a:ext>
             </a:extLst>
           </p:cNvPr>
@@ -2396,7 +2396,7 @@
     </p:spTree>
     <p:extLst>
       <p:ext uri="{BB962C8B-B14F-4D97-AF65-F5344CB8AC3E}">
-        <p14:creationId xmlns:p14="http://schemas.microsoft.com/office/powerpoint/2010/main" val="1972623170"/>
+        <p14:creationId xmlns:p14="http://schemas.microsoft.com/office/powerpoint/2010/main" val="720134134"/>
       </p:ext>
     </p:extLst>
   </p:cSld>
@@ -2427,7 +2427,7 @@
           <p:cNvPr id="14" name="">
             <a:extLst xmlns:a="http://schemas.openxmlformats.org/drawingml/2006/main">
               <a:ext uri="{FF2B5EF4-FFF2-40B4-BE49-F238E27FC236}">
-                <a16:creationId xmlns:a16="http://schemas.microsoft.com/office/drawing/2014/main" id="{3CEF4B50-1DE1-40E3-9C1F-7E2C421D55FB}"/>
+                <a16:creationId xmlns:a16="http://schemas.microsoft.com/office/drawing/2014/main" id="{33768588-516F-40C5-A5AB-CE28EAC0B600}"/>
               </a:ext>
             </a:extLst>
           </p:cNvPr>
@@ -2459,7 +2459,7 @@
           <p:cNvPr id="2" name="">
             <a:extLst xmlns:a="http://schemas.openxmlformats.org/drawingml/2006/main">
               <a:ext uri="{FF2B5EF4-FFF2-40B4-BE49-F238E27FC236}">
-                <a16:creationId xmlns:a16="http://schemas.microsoft.com/office/drawing/2014/main" id="{1C63C65F-36B0-48A3-954D-EC4706ACCA38}"/>
+                <a16:creationId xmlns:a16="http://schemas.microsoft.com/office/drawing/2014/main" id="{F9FE20A8-FF66-4001-986E-98796AF89AB0}"/>
               </a:ext>
             </a:extLst>
           </p:cNvPr>
@@ -2516,7 +2516,7 @@
           <p:cNvPr id="3" name="">
             <a:extLst xmlns:a="http://schemas.openxmlformats.org/drawingml/2006/main">
               <a:ext uri="{FF2B5EF4-FFF2-40B4-BE49-F238E27FC236}">
-                <a16:creationId xmlns:a16="http://schemas.microsoft.com/office/drawing/2014/main" id="{6183EAB9-C13C-4D65-A2E2-97429FC56A72}"/>
+                <a16:creationId xmlns:a16="http://schemas.microsoft.com/office/drawing/2014/main" id="{14DDE95C-0673-46CA-847E-6241ADD7975F}"/>
               </a:ext>
             </a:extLst>
           </p:cNvPr>
@@ -2548,7 +2548,7 @@
           <p:cNvPr id="4" name="">
             <a:extLst xmlns:a="http://schemas.openxmlformats.org/drawingml/2006/main">
               <a:ext uri="{FF2B5EF4-FFF2-40B4-BE49-F238E27FC236}">
-                <a16:creationId xmlns:a16="http://schemas.microsoft.com/office/drawing/2014/main" id="{E482B3B5-835E-4A8F-9EFD-D216AE083C12}"/>
+                <a16:creationId xmlns:a16="http://schemas.microsoft.com/office/drawing/2014/main" id="{33AA141D-101A-4631-93A9-0D0100DDFBDB}"/>
               </a:ext>
             </a:extLst>
           </p:cNvPr>
@@ -2605,7 +2605,7 @@
           <p:cNvPr id="5" name="">
             <a:extLst xmlns:a="http://schemas.openxmlformats.org/drawingml/2006/main">
               <a:ext uri="{FF2B5EF4-FFF2-40B4-BE49-F238E27FC236}">
-                <a16:creationId xmlns:a16="http://schemas.microsoft.com/office/drawing/2014/main" id="{797E7346-902B-48F3-A5E4-4D45B05483A6}"/>
+                <a16:creationId xmlns:a16="http://schemas.microsoft.com/office/drawing/2014/main" id="{4CDCF039-CF75-4960-84A1-C8887DFAB511}"/>
               </a:ext>
             </a:extLst>
           </p:cNvPr>
@@ -2662,7 +2662,7 @@
           <p:cNvPr id="6" name="">
             <a:extLst xmlns:a="http://schemas.openxmlformats.org/drawingml/2006/main">
               <a:ext uri="{FF2B5EF4-FFF2-40B4-BE49-F238E27FC236}">
-                <a16:creationId xmlns:a16="http://schemas.microsoft.com/office/drawing/2014/main" id="{58C3AD54-E225-4B38-BD41-D818598A4D4E}"/>
+                <a16:creationId xmlns:a16="http://schemas.microsoft.com/office/drawing/2014/main" id="{EDCC145A-9C39-4F38-B617-9324626ACA68}"/>
               </a:ext>
             </a:extLst>
           </p:cNvPr>
@@ -2719,7 +2719,7 @@
           <p:cNvPr id="7" name="">
             <a:extLst xmlns:a="http://schemas.openxmlformats.org/drawingml/2006/main">
               <a:ext uri="{FF2B5EF4-FFF2-40B4-BE49-F238E27FC236}">
-                <a16:creationId xmlns:a16="http://schemas.microsoft.com/office/drawing/2014/main" id="{63FA7595-8E4C-48CA-AC01-79608EF2908C}"/>
+                <a16:creationId xmlns:a16="http://schemas.microsoft.com/office/drawing/2014/main" id="{68F7B3C4-A760-4FD7-AEC8-118E8F3F6586}"/>
               </a:ext>
             </a:extLst>
           </p:cNvPr>
@@ -2751,7 +2751,7 @@
           <p:cNvPr id="8" name="">
             <a:extLst xmlns:a="http://schemas.openxmlformats.org/drawingml/2006/main">
               <a:ext uri="{FF2B5EF4-FFF2-40B4-BE49-F238E27FC236}">
-                <a16:creationId xmlns:a16="http://schemas.microsoft.com/office/drawing/2014/main" id="{86FEFBE5-8A9E-48F8-B4DE-EAE56314563A}"/>
+                <a16:creationId xmlns:a16="http://schemas.microsoft.com/office/drawing/2014/main" id="{7D9AAC29-344E-48A7-99F2-5C4444D2E165}"/>
               </a:ext>
             </a:extLst>
           </p:cNvPr>
@@ -2808,7 +2808,7 @@
           <p:cNvPr id="9" name="">
             <a:extLst xmlns:a="http://schemas.openxmlformats.org/drawingml/2006/main">
               <a:ext uri="{FF2B5EF4-FFF2-40B4-BE49-F238E27FC236}">
-                <a16:creationId xmlns:a16="http://schemas.microsoft.com/office/drawing/2014/main" id="{9F8DC40F-C3A3-415C-B429-84FC74BC84F0}"/>
+                <a16:creationId xmlns:a16="http://schemas.microsoft.com/office/drawing/2014/main" id="{6C285528-59EF-462F-8384-E3944ADD3968}"/>
               </a:ext>
             </a:extLst>
           </p:cNvPr>
@@ -2865,7 +2865,7 @@
           <p:cNvPr id="10" name="">
             <a:extLst xmlns:a="http://schemas.openxmlformats.org/drawingml/2006/main">
               <a:ext uri="{FF2B5EF4-FFF2-40B4-BE49-F238E27FC236}">
-                <a16:creationId xmlns:a16="http://schemas.microsoft.com/office/drawing/2014/main" id="{99E2305E-A326-4623-B94D-882F8EC50307}"/>
+                <a16:creationId xmlns:a16="http://schemas.microsoft.com/office/drawing/2014/main" id="{3FC1850F-D671-4B34-8488-F616F67C8FAF}"/>
               </a:ext>
             </a:extLst>
           </p:cNvPr>
@@ -2922,7 +2922,7 @@
           <p:cNvPr id="11" name="">
             <a:extLst xmlns:a="http://schemas.openxmlformats.org/drawingml/2006/main">
               <a:ext uri="{FF2B5EF4-FFF2-40B4-BE49-F238E27FC236}">
-                <a16:creationId xmlns:a16="http://schemas.microsoft.com/office/drawing/2014/main" id="{D19BF5D9-8497-436F-B8A6-27ADE890717F}"/>
+                <a16:creationId xmlns:a16="http://schemas.microsoft.com/office/drawing/2014/main" id="{5128AF02-AD3B-4C6F-ADB0-B69956E3D65B}"/>
               </a:ext>
             </a:extLst>
           </p:cNvPr>
@@ -2979,7 +2979,7 @@
           <p:cNvPr id="12" name="">
             <a:extLst xmlns:a="http://schemas.openxmlformats.org/drawingml/2006/main">
               <a:ext uri="{FF2B5EF4-FFF2-40B4-BE49-F238E27FC236}">
-                <a16:creationId xmlns:a16="http://schemas.microsoft.com/office/drawing/2014/main" id="{8C2416C1-DF0A-436B-A303-0501798F6E9B}"/>
+                <a16:creationId xmlns:a16="http://schemas.microsoft.com/office/drawing/2014/main" id="{8E4D62AC-BCDB-4C37-AF80-9C7F0178D3D9}"/>
               </a:ext>
             </a:extLst>
           </p:cNvPr>
@@ -3036,7 +3036,7 @@
           <p:cNvPr id="13" name="">
             <a:extLst xmlns:a="http://schemas.openxmlformats.org/drawingml/2006/main">
               <a:ext uri="{FF2B5EF4-FFF2-40B4-BE49-F238E27FC236}">
-                <a16:creationId xmlns:a16="http://schemas.microsoft.com/office/drawing/2014/main" id="{573E74E6-8B00-406A-B68C-6B44CCA361B3}"/>
+                <a16:creationId xmlns:a16="http://schemas.microsoft.com/office/drawing/2014/main" id="{B5B28A1B-907E-41C9-8242-7800080B9B69}"/>
               </a:ext>
             </a:extLst>
           </p:cNvPr>
@@ -3091,7 +3091,7 @@
     </p:spTree>
     <p:extLst>
       <p:ext uri="{BB962C8B-B14F-4D97-AF65-F5344CB8AC3E}">
-        <p14:creationId xmlns:p14="http://schemas.microsoft.com/office/powerpoint/2010/main" val="1984540499"/>
+        <p14:creationId xmlns:p14="http://schemas.microsoft.com/office/powerpoint/2010/main" val="230916044"/>
       </p:ext>
     </p:extLst>
   </p:cSld>
@@ -3292,7 +3292,7 @@
           <p:cNvPr id="19" name="">
             <a:extLst xmlns:a="http://schemas.openxmlformats.org/drawingml/2006/main">
               <a:ext uri="{FF2B5EF4-FFF2-40B4-BE49-F238E27FC236}">
-                <a16:creationId xmlns:a16="http://schemas.microsoft.com/office/drawing/2014/main" id="{786A1EB6-9BD9-4383-A336-E66D0B1D2417}"/>
+                <a16:creationId xmlns:a16="http://schemas.microsoft.com/office/drawing/2014/main" id="{ECD09FA9-C585-4D21-8C6F-711EB635B2B6}"/>
               </a:ext>
             </a:extLst>
           </p:cNvPr>
@@ -3324,7 +3324,7 @@
           <p:cNvPr id="2" name="">
             <a:extLst xmlns:a="http://schemas.openxmlformats.org/drawingml/2006/main">
               <a:ext uri="{FF2B5EF4-FFF2-40B4-BE49-F238E27FC236}">
-                <a16:creationId xmlns:a16="http://schemas.microsoft.com/office/drawing/2014/main" id="{5F4D638B-F134-4999-9A94-40C66703D47C}"/>
+                <a16:creationId xmlns:a16="http://schemas.microsoft.com/office/drawing/2014/main" id="{64FD7611-EBF6-47F4-8FC7-3020417ACFD9}"/>
               </a:ext>
             </a:extLst>
           </p:cNvPr>
@@ -3381,7 +3381,7 @@
           <p:cNvPr id="3" name="">
             <a:extLst xmlns:a="http://schemas.openxmlformats.org/drawingml/2006/main">
               <a:ext uri="{FF2B5EF4-FFF2-40B4-BE49-F238E27FC236}">
-                <a16:creationId xmlns:a16="http://schemas.microsoft.com/office/drawing/2014/main" id="{CF92ABF7-23DF-4291-A813-FEF9EE0FC7E0}"/>
+                <a16:creationId xmlns:a16="http://schemas.microsoft.com/office/drawing/2014/main" id="{C088E0EE-8892-42CD-B240-56CB69E5FE84}"/>
               </a:ext>
             </a:extLst>
           </p:cNvPr>
@@ -3413,7 +3413,7 @@
           <p:cNvPr id="4" name="">
             <a:extLst xmlns:a="http://schemas.openxmlformats.org/drawingml/2006/main">
               <a:ext uri="{FF2B5EF4-FFF2-40B4-BE49-F238E27FC236}">
-                <a16:creationId xmlns:a16="http://schemas.microsoft.com/office/drawing/2014/main" id="{DF5E13F3-64EB-42C6-97E2-19C06118CDF9}"/>
+                <a16:creationId xmlns:a16="http://schemas.microsoft.com/office/drawing/2014/main" id="{4F849E6F-0FA9-4A39-8CC6-D820604CF36C}"/>
               </a:ext>
             </a:extLst>
           </p:cNvPr>
@@ -3470,7 +3470,7 @@
           <p:cNvPr id="5" name="">
             <a:extLst xmlns:a="http://schemas.openxmlformats.org/drawingml/2006/main">
               <a:ext uri="{FF2B5EF4-FFF2-40B4-BE49-F238E27FC236}">
-                <a16:creationId xmlns:a16="http://schemas.microsoft.com/office/drawing/2014/main" id="{6ED411E9-530D-4E6D-9768-C922717E4F73}"/>
+                <a16:creationId xmlns:a16="http://schemas.microsoft.com/office/drawing/2014/main" id="{2FB6A580-1520-4449-8AD6-A0B02FBFAD72}"/>
               </a:ext>
             </a:extLst>
           </p:cNvPr>
@@ -3527,7 +3527,7 @@
           <p:cNvPr id="6" name="">
             <a:extLst xmlns:a="http://schemas.openxmlformats.org/drawingml/2006/main">
               <a:ext uri="{FF2B5EF4-FFF2-40B4-BE49-F238E27FC236}">
-                <a16:creationId xmlns:a16="http://schemas.microsoft.com/office/drawing/2014/main" id="{5469D1E6-31B7-4AC9-ACB9-242292DDEA00}"/>
+                <a16:creationId xmlns:a16="http://schemas.microsoft.com/office/drawing/2014/main" id="{26C6EB0D-FAF8-4E79-875F-E9E59794FADC}"/>
               </a:ext>
             </a:extLst>
           </p:cNvPr>
@@ -3584,7 +3584,7 @@
           <p:cNvPr id="7" name="">
             <a:extLst xmlns:a="http://schemas.openxmlformats.org/drawingml/2006/main">
               <a:ext uri="{FF2B5EF4-FFF2-40B4-BE49-F238E27FC236}">
-                <a16:creationId xmlns:a16="http://schemas.microsoft.com/office/drawing/2014/main" id="{5CAAAEED-76F6-403E-BC21-4A1F63006E01}"/>
+                <a16:creationId xmlns:a16="http://schemas.microsoft.com/office/drawing/2014/main" id="{88F06F60-E4E7-4DA8-B792-8263060F23A5}"/>
               </a:ext>
             </a:extLst>
           </p:cNvPr>
@@ -3616,7 +3616,7 @@
           <p:cNvPr id="8" name="">
             <a:extLst xmlns:a="http://schemas.openxmlformats.org/drawingml/2006/main">
               <a:ext uri="{FF2B5EF4-FFF2-40B4-BE49-F238E27FC236}">
-                <a16:creationId xmlns:a16="http://schemas.microsoft.com/office/drawing/2014/main" id="{09F99738-201E-4FA9-92F2-D25CC2D5558E}"/>
+                <a16:creationId xmlns:a16="http://schemas.microsoft.com/office/drawing/2014/main" id="{F0D8D3CB-137D-4C4C-896F-412D18C5F8EB}"/>
               </a:ext>
             </a:extLst>
           </p:cNvPr>
@@ -3673,7 +3673,7 @@
           <p:cNvPr id="9" name="">
             <a:extLst xmlns:a="http://schemas.openxmlformats.org/drawingml/2006/main">
               <a:ext uri="{FF2B5EF4-FFF2-40B4-BE49-F238E27FC236}">
-                <a16:creationId xmlns:a16="http://schemas.microsoft.com/office/drawing/2014/main" id="{16D4F57F-D299-4587-9A51-CFF978740CC3}"/>
+                <a16:creationId xmlns:a16="http://schemas.microsoft.com/office/drawing/2014/main" id="{E9C8B554-4CBD-420D-BA3B-3131E7C0EAF4}"/>
               </a:ext>
             </a:extLst>
           </p:cNvPr>
@@ -3730,7 +3730,7 @@
           <p:cNvPr id="10" name="">
             <a:extLst xmlns:a="http://schemas.openxmlformats.org/drawingml/2006/main">
               <a:ext uri="{FF2B5EF4-FFF2-40B4-BE49-F238E27FC236}">
-                <a16:creationId xmlns:a16="http://schemas.microsoft.com/office/drawing/2014/main" id="{53D59AEB-7D57-4B90-98C1-3DA1D45F7351}"/>
+                <a16:creationId xmlns:a16="http://schemas.microsoft.com/office/drawing/2014/main" id="{F010F72A-D981-403F-AE9F-9E5DB1046692}"/>
               </a:ext>
             </a:extLst>
           </p:cNvPr>
@@ -3787,7 +3787,7 @@
           <p:cNvPr id="11" name="">
             <a:extLst xmlns:a="http://schemas.openxmlformats.org/drawingml/2006/main">
               <a:ext uri="{FF2B5EF4-FFF2-40B4-BE49-F238E27FC236}">
-                <a16:creationId xmlns:a16="http://schemas.microsoft.com/office/drawing/2014/main" id="{AE8801C7-75F1-4F52-8CF4-1C259605D5A4}"/>
+                <a16:creationId xmlns:a16="http://schemas.microsoft.com/office/drawing/2014/main" id="{C94EDED1-F851-4520-98DB-146F2B1C48E1}"/>
               </a:ext>
             </a:extLst>
           </p:cNvPr>
@@ -3821,7 +3821,7 @@
           <p:cNvPr id="12" name="">
             <a:extLst xmlns:a="http://schemas.openxmlformats.org/drawingml/2006/main">
               <a:ext uri="{FF2B5EF4-FFF2-40B4-BE49-F238E27FC236}">
-                <a16:creationId xmlns:a16="http://schemas.microsoft.com/office/drawing/2014/main" id="{EC58A8F5-7B7C-40E2-90C1-EE3B62033D8D}"/>
+                <a16:creationId xmlns:a16="http://schemas.microsoft.com/office/drawing/2014/main" id="{E26B3D46-B721-4E51-982B-3A61A934722D}"/>
               </a:ext>
             </a:extLst>
           </p:cNvPr>
@@ -3878,7 +3878,7 @@
           <p:cNvPr id="13" name="">
             <a:extLst xmlns:a="http://schemas.openxmlformats.org/drawingml/2006/main">
               <a:ext uri="{FF2B5EF4-FFF2-40B4-BE49-F238E27FC236}">
-                <a16:creationId xmlns:a16="http://schemas.microsoft.com/office/drawing/2014/main" id="{4C8067FE-7029-45A6-B6AF-F50EB536F3D7}"/>
+                <a16:creationId xmlns:a16="http://schemas.microsoft.com/office/drawing/2014/main" id="{7107E3CA-DEB7-4DC9-95F0-1E84E63CBC64}"/>
               </a:ext>
             </a:extLst>
           </p:cNvPr>
@@ -3935,7 +3935,7 @@
           <p:cNvPr id="14" name="">
             <a:extLst xmlns:a="http://schemas.openxmlformats.org/drawingml/2006/main">
               <a:ext uri="{FF2B5EF4-FFF2-40B4-BE49-F238E27FC236}">
-                <a16:creationId xmlns:a16="http://schemas.microsoft.com/office/drawing/2014/main" id="{D296593F-3F7E-4235-A494-8F00EAF8FDBF}"/>
+                <a16:creationId xmlns:a16="http://schemas.microsoft.com/office/drawing/2014/main" id="{FE9BA403-38ED-4395-A4F3-4FEF585C8A2B}"/>
               </a:ext>
             </a:extLst>
           </p:cNvPr>
@@ -3992,7 +3992,7 @@
           <p:cNvPr id="15" name="">
             <a:extLst xmlns:a="http://schemas.openxmlformats.org/drawingml/2006/main">
               <a:ext uri="{FF2B5EF4-FFF2-40B4-BE49-F238E27FC236}">
-                <a16:creationId xmlns:a16="http://schemas.microsoft.com/office/drawing/2014/main" id="{4412C08B-D662-45E5-9CA0-DABB34E48B0A}"/>
+                <a16:creationId xmlns:a16="http://schemas.microsoft.com/office/drawing/2014/main" id="{8AC28A42-0872-4746-B21C-11F3988228E4}"/>
               </a:ext>
             </a:extLst>
           </p:cNvPr>
@@ -4026,7 +4026,7 @@
           <p:cNvPr id="16" name="">
             <a:extLst xmlns:a="http://schemas.openxmlformats.org/drawingml/2006/main">
               <a:ext uri="{FF2B5EF4-FFF2-40B4-BE49-F238E27FC236}">
-                <a16:creationId xmlns:a16="http://schemas.microsoft.com/office/drawing/2014/main" id="{20563EB1-BF60-4340-9755-14EED8272971}"/>
+                <a16:creationId xmlns:a16="http://schemas.microsoft.com/office/drawing/2014/main" id="{1167B6B2-507B-4736-9C5F-A08CD396368B}"/>
               </a:ext>
             </a:extLst>
           </p:cNvPr>
@@ -4083,7 +4083,7 @@
           <p:cNvPr id="17" name="">
             <a:extLst xmlns:a="http://schemas.openxmlformats.org/drawingml/2006/main">
               <a:ext uri="{FF2B5EF4-FFF2-40B4-BE49-F238E27FC236}">
-                <a16:creationId xmlns:a16="http://schemas.microsoft.com/office/drawing/2014/main" id="{DAEB1593-42AE-4410-B859-97F4E87069F9}"/>
+                <a16:creationId xmlns:a16="http://schemas.microsoft.com/office/drawing/2014/main" id="{990B6931-86E6-4450-A441-41BBA85AA3E8}"/>
               </a:ext>
             </a:extLst>
           </p:cNvPr>
@@ -4140,7 +4140,7 @@
           <p:cNvPr id="18" name="">
             <a:extLst xmlns:a="http://schemas.openxmlformats.org/drawingml/2006/main">
               <a:ext uri="{FF2B5EF4-FFF2-40B4-BE49-F238E27FC236}">
-                <a16:creationId xmlns:a16="http://schemas.microsoft.com/office/drawing/2014/main" id="{CB45E60E-56B4-43FA-B11D-7246BBB6C8F0}"/>
+                <a16:creationId xmlns:a16="http://schemas.microsoft.com/office/drawing/2014/main" id="{00396B4B-B228-4887-8F65-64B74C7A175D}"/>
               </a:ext>
             </a:extLst>
           </p:cNvPr>
@@ -4195,7 +4195,7 @@
     </p:spTree>
     <p:extLst>
       <p:ext uri="{BB962C8B-B14F-4D97-AF65-F5344CB8AC3E}">
-        <p14:creationId xmlns:p14="http://schemas.microsoft.com/office/powerpoint/2010/main" val="889691766"/>
+        <p14:creationId xmlns:p14="http://schemas.microsoft.com/office/powerpoint/2010/main" val="1443843549"/>
       </p:ext>
     </p:extLst>
   </p:cSld>
@@ -4350,7 +4350,7 @@
           <p:cNvPr id="23" name="">
             <a:extLst xmlns:a="http://schemas.openxmlformats.org/drawingml/2006/main">
               <a:ext uri="{FF2B5EF4-FFF2-40B4-BE49-F238E27FC236}">
-                <a16:creationId xmlns:a16="http://schemas.microsoft.com/office/drawing/2014/main" id="{C06C0F23-81C1-425D-B225-D405B125320D}"/>
+                <a16:creationId xmlns:a16="http://schemas.microsoft.com/office/drawing/2014/main" id="{6F6FF56A-437C-446E-9CC2-0C92EBEDF307}"/>
               </a:ext>
             </a:extLst>
           </p:cNvPr>
@@ -4382,7 +4382,7 @@
           <p:cNvPr id="2" name="">
             <a:extLst xmlns:a="http://schemas.openxmlformats.org/drawingml/2006/main">
               <a:ext uri="{FF2B5EF4-FFF2-40B4-BE49-F238E27FC236}">
-                <a16:creationId xmlns:a16="http://schemas.microsoft.com/office/drawing/2014/main" id="{2288F2C2-A668-41B4-BF03-88630A226017}"/>
+                <a16:creationId xmlns:a16="http://schemas.microsoft.com/office/drawing/2014/main" id="{FD963DEC-435C-4886-961F-B34EB673F8C3}"/>
               </a:ext>
             </a:extLst>
           </p:cNvPr>
@@ -4439,7 +4439,7 @@
           <p:cNvPr id="3" name="">
             <a:extLst xmlns:a="http://schemas.openxmlformats.org/drawingml/2006/main">
               <a:ext uri="{FF2B5EF4-FFF2-40B4-BE49-F238E27FC236}">
-                <a16:creationId xmlns:a16="http://schemas.microsoft.com/office/drawing/2014/main" id="{5BB3CB71-F177-4D20-B138-61AD193D665D}"/>
+                <a16:creationId xmlns:a16="http://schemas.microsoft.com/office/drawing/2014/main" id="{512A9392-A3AE-41D9-A91A-3CAD6ADE34F4}"/>
               </a:ext>
             </a:extLst>
           </p:cNvPr>
@@ -4471,7 +4471,7 @@
           <p:cNvPr id="4" name="">
             <a:extLst xmlns:a="http://schemas.openxmlformats.org/drawingml/2006/main">
               <a:ext uri="{FF2B5EF4-FFF2-40B4-BE49-F238E27FC236}">
-                <a16:creationId xmlns:a16="http://schemas.microsoft.com/office/drawing/2014/main" id="{803516D4-2DD5-4C82-B6FF-89BDF04289FF}"/>
+                <a16:creationId xmlns:a16="http://schemas.microsoft.com/office/drawing/2014/main" id="{DFE9DDE2-400D-430E-A21E-EFAFE75860F3}"/>
               </a:ext>
             </a:extLst>
           </p:cNvPr>
@@ -4528,7 +4528,7 @@
           <p:cNvPr id="5" name="">
             <a:extLst xmlns:a="http://schemas.openxmlformats.org/drawingml/2006/main">
               <a:ext uri="{FF2B5EF4-FFF2-40B4-BE49-F238E27FC236}">
-                <a16:creationId xmlns:a16="http://schemas.microsoft.com/office/drawing/2014/main" id="{6853E2D8-90A5-4EBD-9F6F-740B3D5867EA}"/>
+                <a16:creationId xmlns:a16="http://schemas.microsoft.com/office/drawing/2014/main" id="{A1E47E11-5D5F-40DF-A46A-4DF438CA6CD3}"/>
               </a:ext>
             </a:extLst>
           </p:cNvPr>
@@ -4585,7 +4585,7 @@
           <p:cNvPr id="6" name="">
             <a:extLst xmlns:a="http://schemas.openxmlformats.org/drawingml/2006/main">
               <a:ext uri="{FF2B5EF4-FFF2-40B4-BE49-F238E27FC236}">
-                <a16:creationId xmlns:a16="http://schemas.microsoft.com/office/drawing/2014/main" id="{4F8CCFD3-AF99-4A71-8B5B-990AA5214EF0}"/>
+                <a16:creationId xmlns:a16="http://schemas.microsoft.com/office/drawing/2014/main" id="{DF1DD4E1-B7FB-4007-9BB6-1FEA4C45E860}"/>
               </a:ext>
             </a:extLst>
           </p:cNvPr>
@@ -4642,7 +4642,7 @@
           <p:cNvPr id="7" name="">
             <a:extLst xmlns:a="http://schemas.openxmlformats.org/drawingml/2006/main">
               <a:ext uri="{FF2B5EF4-FFF2-40B4-BE49-F238E27FC236}">
-                <a16:creationId xmlns:a16="http://schemas.microsoft.com/office/drawing/2014/main" id="{66139EDA-4567-47DF-A583-65D1B010138E}"/>
+                <a16:creationId xmlns:a16="http://schemas.microsoft.com/office/drawing/2014/main" id="{1DFCA63D-C38C-4A0E-B7FA-29E01C5BB6DD}"/>
               </a:ext>
             </a:extLst>
           </p:cNvPr>
@@ -4674,7 +4674,7 @@
           <p:cNvPr id="8" name="">
             <a:extLst xmlns:a="http://schemas.openxmlformats.org/drawingml/2006/main">
               <a:ext uri="{FF2B5EF4-FFF2-40B4-BE49-F238E27FC236}">
-                <a16:creationId xmlns:a16="http://schemas.microsoft.com/office/drawing/2014/main" id="{1E8C1D1D-9962-40E2-979C-9816EEE70E48}"/>
+                <a16:creationId xmlns:a16="http://schemas.microsoft.com/office/drawing/2014/main" id="{F55316CD-1280-4466-92DC-FBF6C5D0754B}"/>
               </a:ext>
             </a:extLst>
           </p:cNvPr>
@@ -4731,7 +4731,7 @@
           <p:cNvPr id="9" name="">
             <a:extLst xmlns:a="http://schemas.openxmlformats.org/drawingml/2006/main">
               <a:ext uri="{FF2B5EF4-FFF2-40B4-BE49-F238E27FC236}">
-                <a16:creationId xmlns:a16="http://schemas.microsoft.com/office/drawing/2014/main" id="{6F15E755-CEE2-448B-AFE9-B3D4C0D365EB}"/>
+                <a16:creationId xmlns:a16="http://schemas.microsoft.com/office/drawing/2014/main" id="{FEFC64C2-C268-473C-AFDE-4BE79636E2B7}"/>
               </a:ext>
             </a:extLst>
           </p:cNvPr>
@@ -4788,7 +4788,7 @@
           <p:cNvPr id="10" name="">
             <a:extLst xmlns:a="http://schemas.openxmlformats.org/drawingml/2006/main">
               <a:ext uri="{FF2B5EF4-FFF2-40B4-BE49-F238E27FC236}">
-                <a16:creationId xmlns:a16="http://schemas.microsoft.com/office/drawing/2014/main" id="{A249F534-5E30-478E-AFF6-CB731BBED6B0}"/>
+                <a16:creationId xmlns:a16="http://schemas.microsoft.com/office/drawing/2014/main" id="{69B109E7-1F44-4E2C-B3CB-8B9CA1BBA80D}"/>
               </a:ext>
             </a:extLst>
           </p:cNvPr>
@@ -4822,7 +4822,7 @@
           <p:cNvPr id="11" name="">
             <a:extLst xmlns:a="http://schemas.openxmlformats.org/drawingml/2006/main">
               <a:ext uri="{FF2B5EF4-FFF2-40B4-BE49-F238E27FC236}">
-                <a16:creationId xmlns:a16="http://schemas.microsoft.com/office/drawing/2014/main" id="{FC355FE4-59C0-4AC9-848B-EA18133FA223}"/>
+                <a16:creationId xmlns:a16="http://schemas.microsoft.com/office/drawing/2014/main" id="{67EE4E8E-C314-4BD7-890A-69E7A09D1BAD}"/>
               </a:ext>
             </a:extLst>
           </p:cNvPr>
@@ -4854,7 +4854,7 @@
           <p:cNvPr id="12" name="">
             <a:extLst xmlns:a="http://schemas.openxmlformats.org/drawingml/2006/main">
               <a:ext uri="{FF2B5EF4-FFF2-40B4-BE49-F238E27FC236}">
-                <a16:creationId xmlns:a16="http://schemas.microsoft.com/office/drawing/2014/main" id="{7D8344C9-EE71-41DA-A950-B58511749E8C}"/>
+                <a16:creationId xmlns:a16="http://schemas.microsoft.com/office/drawing/2014/main" id="{B86769CD-CEE0-4805-81C3-BA7680D4CB27}"/>
               </a:ext>
             </a:extLst>
           </p:cNvPr>
@@ -4911,7 +4911,7 @@
           <p:cNvPr id="13" name="">
             <a:extLst xmlns:a="http://schemas.openxmlformats.org/drawingml/2006/main">
               <a:ext uri="{FF2B5EF4-FFF2-40B4-BE49-F238E27FC236}">
-                <a16:creationId xmlns:a16="http://schemas.microsoft.com/office/drawing/2014/main" id="{6E9B2683-9064-4056-9D6F-C136AD276CED}"/>
+                <a16:creationId xmlns:a16="http://schemas.microsoft.com/office/drawing/2014/main" id="{A5F126CC-F936-4DD7-B968-59D38CDBCE87}"/>
               </a:ext>
             </a:extLst>
           </p:cNvPr>
@@ -4968,7 +4968,7 @@
           <p:cNvPr id="14" name="">
             <a:extLst xmlns:a="http://schemas.openxmlformats.org/drawingml/2006/main">
               <a:ext uri="{FF2B5EF4-FFF2-40B4-BE49-F238E27FC236}">
-                <a16:creationId xmlns:a16="http://schemas.microsoft.com/office/drawing/2014/main" id="{51B8EA1A-15D0-43AC-843A-F1AF13AECD4A}"/>
+                <a16:creationId xmlns:a16="http://schemas.microsoft.com/office/drawing/2014/main" id="{3DAA6049-C0E4-4D5B-8E97-19B40D25CFD5}"/>
               </a:ext>
             </a:extLst>
           </p:cNvPr>
@@ -5002,7 +5002,7 @@
           <p:cNvPr id="15" name="">
             <a:extLst xmlns:a="http://schemas.openxmlformats.org/drawingml/2006/main">
               <a:ext uri="{FF2B5EF4-FFF2-40B4-BE49-F238E27FC236}">
-                <a16:creationId xmlns:a16="http://schemas.microsoft.com/office/drawing/2014/main" id="{A52CD274-169E-4E0B-A6DB-82814E496245}"/>
+                <a16:creationId xmlns:a16="http://schemas.microsoft.com/office/drawing/2014/main" id="{7947EFCE-E05F-4E64-9D87-5E04A777F2E1}"/>
               </a:ext>
             </a:extLst>
           </p:cNvPr>
@@ -5034,7 +5034,7 @@
           <p:cNvPr id="16" name="">
             <a:extLst xmlns:a="http://schemas.openxmlformats.org/drawingml/2006/main">
               <a:ext uri="{FF2B5EF4-FFF2-40B4-BE49-F238E27FC236}">
-                <a16:creationId xmlns:a16="http://schemas.microsoft.com/office/drawing/2014/main" id="{084F2F24-7EAC-481F-80CC-9426633787AB}"/>
+                <a16:creationId xmlns:a16="http://schemas.microsoft.com/office/drawing/2014/main" id="{B12114A1-637A-41D8-88AA-CDA7F91331C0}"/>
               </a:ext>
             </a:extLst>
           </p:cNvPr>
@@ -5091,7 +5091,7 @@
           <p:cNvPr id="17" name="">
             <a:extLst xmlns:a="http://schemas.openxmlformats.org/drawingml/2006/main">
               <a:ext uri="{FF2B5EF4-FFF2-40B4-BE49-F238E27FC236}">
-                <a16:creationId xmlns:a16="http://schemas.microsoft.com/office/drawing/2014/main" id="{07C557CC-2FDC-4166-9310-EDDECACE9F32}"/>
+                <a16:creationId xmlns:a16="http://schemas.microsoft.com/office/drawing/2014/main" id="{2EB9EE46-7A0C-46AC-9EFD-A9D381FB9D75}"/>
               </a:ext>
             </a:extLst>
           </p:cNvPr>
@@ -5148,7 +5148,7 @@
           <p:cNvPr id="18" name="">
             <a:extLst xmlns:a="http://schemas.openxmlformats.org/drawingml/2006/main">
               <a:ext uri="{FF2B5EF4-FFF2-40B4-BE49-F238E27FC236}">
-                <a16:creationId xmlns:a16="http://schemas.microsoft.com/office/drawing/2014/main" id="{304761EB-8D86-4786-B0CF-B454E25E57F8}"/>
+                <a16:creationId xmlns:a16="http://schemas.microsoft.com/office/drawing/2014/main" id="{8B8FE037-6379-4281-B6A4-46B7B2E2C3C7}"/>
               </a:ext>
             </a:extLst>
           </p:cNvPr>
@@ -5182,7 +5182,7 @@
           <p:cNvPr id="19" name="">
             <a:extLst xmlns:a="http://schemas.openxmlformats.org/drawingml/2006/main">
               <a:ext uri="{FF2B5EF4-FFF2-40B4-BE49-F238E27FC236}">
-                <a16:creationId xmlns:a16="http://schemas.microsoft.com/office/drawing/2014/main" id="{B471CD3A-8730-4C0D-8280-96B5E5C95209}"/>
+                <a16:creationId xmlns:a16="http://schemas.microsoft.com/office/drawing/2014/main" id="{45CB6897-4C12-4049-BF82-77F1C8E687F0}"/>
               </a:ext>
             </a:extLst>
           </p:cNvPr>
@@ -5214,7 +5214,7 @@
           <p:cNvPr id="20" name="">
             <a:extLst xmlns:a="http://schemas.openxmlformats.org/drawingml/2006/main">
               <a:ext uri="{FF2B5EF4-FFF2-40B4-BE49-F238E27FC236}">
-                <a16:creationId xmlns:a16="http://schemas.microsoft.com/office/drawing/2014/main" id="{B486167D-7A18-4D11-97D1-704758F0BD5D}"/>
+                <a16:creationId xmlns:a16="http://schemas.microsoft.com/office/drawing/2014/main" id="{9BBE85C9-D9C8-458B-ACBE-5B9505F0F6C2}"/>
               </a:ext>
             </a:extLst>
           </p:cNvPr>
@@ -5271,7 +5271,7 @@
           <p:cNvPr id="21" name="">
             <a:extLst xmlns:a="http://schemas.openxmlformats.org/drawingml/2006/main">
               <a:ext uri="{FF2B5EF4-FFF2-40B4-BE49-F238E27FC236}">
-                <a16:creationId xmlns:a16="http://schemas.microsoft.com/office/drawing/2014/main" id="{37D1C75C-025B-425C-BE30-4040F03452EB}"/>
+                <a16:creationId xmlns:a16="http://schemas.microsoft.com/office/drawing/2014/main" id="{0C0549F2-B19B-4347-912E-89E9508DCE30}"/>
               </a:ext>
             </a:extLst>
           </p:cNvPr>
@@ -5328,7 +5328,7 @@
           <p:cNvPr id="22" name="">
             <a:extLst xmlns:a="http://schemas.openxmlformats.org/drawingml/2006/main">
               <a:ext uri="{FF2B5EF4-FFF2-40B4-BE49-F238E27FC236}">
-                <a16:creationId xmlns:a16="http://schemas.microsoft.com/office/drawing/2014/main" id="{054C7102-DEAA-44B8-AD9F-B228E2478E3F}"/>
+                <a16:creationId xmlns:a16="http://schemas.microsoft.com/office/drawing/2014/main" id="{B4C7FE1B-E70D-46C4-ADF5-8DE5639DF111}"/>
               </a:ext>
             </a:extLst>
           </p:cNvPr>
@@ -5383,7 +5383,7 @@
     </p:spTree>
     <p:extLst>
       <p:ext uri="{BB962C8B-B14F-4D97-AF65-F5344CB8AC3E}">
-        <p14:creationId xmlns:p14="http://schemas.microsoft.com/office/powerpoint/2010/main" val="42937987"/>
+        <p14:creationId xmlns:p14="http://schemas.microsoft.com/office/powerpoint/2010/main" val="688440549"/>
       </p:ext>
     </p:extLst>
   </p:cSld>
@@ -5584,7 +5584,7 @@
           <p:cNvPr id="23" name="">
             <a:extLst xmlns:a="http://schemas.openxmlformats.org/drawingml/2006/main">
               <a:ext uri="{FF2B5EF4-FFF2-40B4-BE49-F238E27FC236}">
-                <a16:creationId xmlns:a16="http://schemas.microsoft.com/office/drawing/2014/main" id="{ABC86382-5119-454B-A512-C5E0DF756C31}"/>
+                <a16:creationId xmlns:a16="http://schemas.microsoft.com/office/drawing/2014/main" id="{1C5169E8-169E-4A60-9C4E-D8BF73175D16}"/>
               </a:ext>
             </a:extLst>
           </p:cNvPr>
@@ -5616,7 +5616,7 @@
           <p:cNvPr id="2" name="">
             <a:extLst xmlns:a="http://schemas.openxmlformats.org/drawingml/2006/main">
               <a:ext uri="{FF2B5EF4-FFF2-40B4-BE49-F238E27FC236}">
-                <a16:creationId xmlns:a16="http://schemas.microsoft.com/office/drawing/2014/main" id="{AE9EFE12-C8DA-46BA-B612-D9C8D7438FD8}"/>
+                <a16:creationId xmlns:a16="http://schemas.microsoft.com/office/drawing/2014/main" id="{769A7D38-536C-4359-A06F-B14E60BC26AA}"/>
               </a:ext>
             </a:extLst>
           </p:cNvPr>
@@ -5673,7 +5673,7 @@
           <p:cNvPr id="3" name="">
             <a:extLst xmlns:a="http://schemas.openxmlformats.org/drawingml/2006/main">
               <a:ext uri="{FF2B5EF4-FFF2-40B4-BE49-F238E27FC236}">
-                <a16:creationId xmlns:a16="http://schemas.microsoft.com/office/drawing/2014/main" id="{0F4C3685-AD55-451B-B78D-A5761A7D5730}"/>
+                <a16:creationId xmlns:a16="http://schemas.microsoft.com/office/drawing/2014/main" id="{864096BA-4092-49F1-A5EB-C4BDD346AB1A}"/>
               </a:ext>
             </a:extLst>
           </p:cNvPr>
@@ -5705,7 +5705,7 @@
           <p:cNvPr id="4" name="">
             <a:extLst xmlns:a="http://schemas.openxmlformats.org/drawingml/2006/main">
               <a:ext uri="{FF2B5EF4-FFF2-40B4-BE49-F238E27FC236}">
-                <a16:creationId xmlns:a16="http://schemas.microsoft.com/office/drawing/2014/main" id="{89FE32DA-597C-407E-8B84-B689095C29EF}"/>
+                <a16:creationId xmlns:a16="http://schemas.microsoft.com/office/drawing/2014/main" id="{12ECE9A0-8BCC-409D-AEAE-1B4D69EF1E96}"/>
               </a:ext>
             </a:extLst>
           </p:cNvPr>
@@ -5762,7 +5762,7 @@
           <p:cNvPr id="5" name="">
             <a:extLst xmlns:a="http://schemas.openxmlformats.org/drawingml/2006/main">
               <a:ext uri="{FF2B5EF4-FFF2-40B4-BE49-F238E27FC236}">
-                <a16:creationId xmlns:a16="http://schemas.microsoft.com/office/drawing/2014/main" id="{21133ED6-80E8-4009-A7FC-728AADB1C3BB}"/>
+                <a16:creationId xmlns:a16="http://schemas.microsoft.com/office/drawing/2014/main" id="{66150A2B-A8C9-4069-8216-2CFE8CC15FBC}"/>
               </a:ext>
             </a:extLst>
           </p:cNvPr>
@@ -5819,7 +5819,7 @@
           <p:cNvPr id="6" name="">
             <a:extLst xmlns:a="http://schemas.openxmlformats.org/drawingml/2006/main">
               <a:ext uri="{FF2B5EF4-FFF2-40B4-BE49-F238E27FC236}">
-                <a16:creationId xmlns:a16="http://schemas.microsoft.com/office/drawing/2014/main" id="{0427437D-FD17-4238-99E1-83E044AD1814}"/>
+                <a16:creationId xmlns:a16="http://schemas.microsoft.com/office/drawing/2014/main" id="{794913E4-E13E-4FE2-B8E8-D11C7F43A0BB}"/>
               </a:ext>
             </a:extLst>
           </p:cNvPr>
@@ -5876,7 +5876,7 @@
           <p:cNvPr id="7" name="">
             <a:extLst xmlns:a="http://schemas.openxmlformats.org/drawingml/2006/main">
               <a:ext uri="{FF2B5EF4-FFF2-40B4-BE49-F238E27FC236}">
-                <a16:creationId xmlns:a16="http://schemas.microsoft.com/office/drawing/2014/main" id="{D9CA9766-42E6-48F8-A144-4A5284189F6B}"/>
+                <a16:creationId xmlns:a16="http://schemas.microsoft.com/office/drawing/2014/main" id="{598406B3-CBA3-4D94-ACC0-CE75CCD7DA19}"/>
               </a:ext>
             </a:extLst>
           </p:cNvPr>
@@ -5908,7 +5908,7 @@
           <p:cNvPr id="8" name="">
             <a:extLst xmlns:a="http://schemas.openxmlformats.org/drawingml/2006/main">
               <a:ext uri="{FF2B5EF4-FFF2-40B4-BE49-F238E27FC236}">
-                <a16:creationId xmlns:a16="http://schemas.microsoft.com/office/drawing/2014/main" id="{C6322D6C-72F3-4656-8A96-9B86C7DD6C9A}"/>
+                <a16:creationId xmlns:a16="http://schemas.microsoft.com/office/drawing/2014/main" id="{C3A19BE0-3E2A-4F3F-897B-4A30BAE48E40}"/>
               </a:ext>
             </a:extLst>
           </p:cNvPr>
@@ -5965,7 +5965,7 @@
           <p:cNvPr id="9" name="">
             <a:extLst xmlns:a="http://schemas.openxmlformats.org/drawingml/2006/main">
               <a:ext uri="{FF2B5EF4-FFF2-40B4-BE49-F238E27FC236}">
-                <a16:creationId xmlns:a16="http://schemas.microsoft.com/office/drawing/2014/main" id="{CBDD1908-4335-4C31-9928-97FD92ACAD31}"/>
+                <a16:creationId xmlns:a16="http://schemas.microsoft.com/office/drawing/2014/main" id="{ED0AACD4-A278-401E-B3D2-A2528CE7441F}"/>
               </a:ext>
             </a:extLst>
           </p:cNvPr>
@@ -6022,7 +6022,7 @@
           <p:cNvPr id="10" name="">
             <a:extLst xmlns:a="http://schemas.openxmlformats.org/drawingml/2006/main">
               <a:ext uri="{FF2B5EF4-FFF2-40B4-BE49-F238E27FC236}">
-                <a16:creationId xmlns:a16="http://schemas.microsoft.com/office/drawing/2014/main" id="{C24F1E6D-DE56-4CC2-B8DF-C52D20E9F331}"/>
+                <a16:creationId xmlns:a16="http://schemas.microsoft.com/office/drawing/2014/main" id="{69FF7EC2-B33F-4855-9B30-71768B49BB4B}"/>
               </a:ext>
             </a:extLst>
           </p:cNvPr>
@@ -6056,7 +6056,7 @@
           <p:cNvPr id="11" name="">
             <a:extLst xmlns:a="http://schemas.openxmlformats.org/drawingml/2006/main">
               <a:ext uri="{FF2B5EF4-FFF2-40B4-BE49-F238E27FC236}">
-                <a16:creationId xmlns:a16="http://schemas.microsoft.com/office/drawing/2014/main" id="{D9BFF7AE-A36F-483D-9C2D-3176716CC984}"/>
+                <a16:creationId xmlns:a16="http://schemas.microsoft.com/office/drawing/2014/main" id="{CEA78E2D-F2F3-4D87-AF17-151D50A2C0F0}"/>
               </a:ext>
             </a:extLst>
           </p:cNvPr>
@@ -6088,7 +6088,7 @@
           <p:cNvPr id="12" name="">
             <a:extLst xmlns:a="http://schemas.openxmlformats.org/drawingml/2006/main">
               <a:ext uri="{FF2B5EF4-FFF2-40B4-BE49-F238E27FC236}">
-                <a16:creationId xmlns:a16="http://schemas.microsoft.com/office/drawing/2014/main" id="{FEB8A6B6-AC6C-41A5-96ED-946F6A184174}"/>
+                <a16:creationId xmlns:a16="http://schemas.microsoft.com/office/drawing/2014/main" id="{3D06C886-5DED-4A17-850D-D081DC7EE14E}"/>
               </a:ext>
             </a:extLst>
           </p:cNvPr>
@@ -6145,7 +6145,7 @@
           <p:cNvPr id="13" name="">
             <a:extLst xmlns:a="http://schemas.openxmlformats.org/drawingml/2006/main">
               <a:ext uri="{FF2B5EF4-FFF2-40B4-BE49-F238E27FC236}">
-                <a16:creationId xmlns:a16="http://schemas.microsoft.com/office/drawing/2014/main" id="{0DBE9522-0A0C-480C-ABB6-4000021C0C31}"/>
+                <a16:creationId xmlns:a16="http://schemas.microsoft.com/office/drawing/2014/main" id="{7AEA09D8-24FF-4B7C-B462-CB2F6E070B8B}"/>
               </a:ext>
             </a:extLst>
           </p:cNvPr>
@@ -6202,7 +6202,7 @@
           <p:cNvPr id="14" name="">
             <a:extLst xmlns:a="http://schemas.openxmlformats.org/drawingml/2006/main">
               <a:ext uri="{FF2B5EF4-FFF2-40B4-BE49-F238E27FC236}">
-                <a16:creationId xmlns:a16="http://schemas.microsoft.com/office/drawing/2014/main" id="{ABBD32EB-8576-4D24-991C-5A2BB1F3CA1A}"/>
+                <a16:creationId xmlns:a16="http://schemas.microsoft.com/office/drawing/2014/main" id="{7362B9C4-D68B-40AC-A0F1-3DCCA59840FF}"/>
               </a:ext>
             </a:extLst>
           </p:cNvPr>
@@ -6236,7 +6236,7 @@
           <p:cNvPr id="15" name="">
             <a:extLst xmlns:a="http://schemas.openxmlformats.org/drawingml/2006/main">
               <a:ext uri="{FF2B5EF4-FFF2-40B4-BE49-F238E27FC236}">
-                <a16:creationId xmlns:a16="http://schemas.microsoft.com/office/drawing/2014/main" id="{6A67D66A-4EDD-48B2-8868-063FCA51D36C}"/>
+                <a16:creationId xmlns:a16="http://schemas.microsoft.com/office/drawing/2014/main" id="{E15C2294-E521-4A01-89E3-40D72FC88212}"/>
               </a:ext>
             </a:extLst>
           </p:cNvPr>
@@ -6268,7 +6268,7 @@
           <p:cNvPr id="16" name="">
             <a:extLst xmlns:a="http://schemas.openxmlformats.org/drawingml/2006/main">
               <a:ext uri="{FF2B5EF4-FFF2-40B4-BE49-F238E27FC236}">
-                <a16:creationId xmlns:a16="http://schemas.microsoft.com/office/drawing/2014/main" id="{AC43B707-118B-437C-83C2-386729974F3E}"/>
+                <a16:creationId xmlns:a16="http://schemas.microsoft.com/office/drawing/2014/main" id="{C8959FDF-794D-4D4D-BD7B-9B0A0862B3A5}"/>
               </a:ext>
             </a:extLst>
           </p:cNvPr>
@@ -6325,7 +6325,7 @@
           <p:cNvPr id="17" name="">
             <a:extLst xmlns:a="http://schemas.openxmlformats.org/drawingml/2006/main">
               <a:ext uri="{FF2B5EF4-FFF2-40B4-BE49-F238E27FC236}">
-                <a16:creationId xmlns:a16="http://schemas.microsoft.com/office/drawing/2014/main" id="{E6668E33-070E-4271-B8BA-AF56F3FD5360}"/>
+                <a16:creationId xmlns:a16="http://schemas.microsoft.com/office/drawing/2014/main" id="{E334AC1A-4A49-4970-8162-F7B1B871BD2B}"/>
               </a:ext>
             </a:extLst>
           </p:cNvPr>
@@ -6382,7 +6382,7 @@
           <p:cNvPr id="18" name="">
             <a:extLst xmlns:a="http://schemas.openxmlformats.org/drawingml/2006/main">
               <a:ext uri="{FF2B5EF4-FFF2-40B4-BE49-F238E27FC236}">
-                <a16:creationId xmlns:a16="http://schemas.microsoft.com/office/drawing/2014/main" id="{8071F261-A57D-4B04-BF16-7D1F5B9B19DC}"/>
+                <a16:creationId xmlns:a16="http://schemas.microsoft.com/office/drawing/2014/main" id="{61D82EB1-21E9-4BA6-A739-D6795437C822}"/>
               </a:ext>
             </a:extLst>
           </p:cNvPr>
@@ -6416,7 +6416,7 @@
           <p:cNvPr id="19" name="">
             <a:extLst xmlns:a="http://schemas.openxmlformats.org/drawingml/2006/main">
               <a:ext uri="{FF2B5EF4-FFF2-40B4-BE49-F238E27FC236}">
-                <a16:creationId xmlns:a16="http://schemas.microsoft.com/office/drawing/2014/main" id="{1A85501B-5F2E-45CA-8E46-B2408ACE5346}"/>
+                <a16:creationId xmlns:a16="http://schemas.microsoft.com/office/drawing/2014/main" id="{41004F23-6B4E-4249-B9D5-1FC59E2D8FDF}"/>
               </a:ext>
             </a:extLst>
           </p:cNvPr>
@@ -6448,7 +6448,7 @@
           <p:cNvPr id="20" name="">
             <a:extLst xmlns:a="http://schemas.openxmlformats.org/drawingml/2006/main">
               <a:ext uri="{FF2B5EF4-FFF2-40B4-BE49-F238E27FC236}">
-                <a16:creationId xmlns:a16="http://schemas.microsoft.com/office/drawing/2014/main" id="{16FBBAED-2BF4-44BF-BBAB-8A109440E3A3}"/>
+                <a16:creationId xmlns:a16="http://schemas.microsoft.com/office/drawing/2014/main" id="{FB23F3D3-00B0-4F7E-BCF6-DC9070AEDE7D}"/>
               </a:ext>
             </a:extLst>
           </p:cNvPr>
@@ -6505,7 +6505,7 @@
           <p:cNvPr id="21" name="">
             <a:extLst xmlns:a="http://schemas.openxmlformats.org/drawingml/2006/main">
               <a:ext uri="{FF2B5EF4-FFF2-40B4-BE49-F238E27FC236}">
-                <a16:creationId xmlns:a16="http://schemas.microsoft.com/office/drawing/2014/main" id="{6445A24D-F8BE-43F6-A36A-3EF91545DFE4}"/>
+                <a16:creationId xmlns:a16="http://schemas.microsoft.com/office/drawing/2014/main" id="{5279575B-390B-4C1B-999F-B0E290731289}"/>
               </a:ext>
             </a:extLst>
           </p:cNvPr>
@@ -6562,7 +6562,7 @@
           <p:cNvPr id="22" name="">
             <a:extLst xmlns:a="http://schemas.openxmlformats.org/drawingml/2006/main">
               <a:ext uri="{FF2B5EF4-FFF2-40B4-BE49-F238E27FC236}">
-                <a16:creationId xmlns:a16="http://schemas.microsoft.com/office/drawing/2014/main" id="{C7B990F9-68B6-4056-A2D7-A4292227D3A6}"/>
+                <a16:creationId xmlns:a16="http://schemas.microsoft.com/office/drawing/2014/main" id="{0008EA8D-CE16-4C1C-960D-149217EB9F86}"/>
               </a:ext>
             </a:extLst>
           </p:cNvPr>
@@ -6617,7 +6617,7 @@
     </p:spTree>
     <p:extLst>
       <p:ext uri="{BB962C8B-B14F-4D97-AF65-F5344CB8AC3E}">
-        <p14:creationId xmlns:p14="http://schemas.microsoft.com/office/powerpoint/2010/main" val="828869691"/>
+        <p14:creationId xmlns:p14="http://schemas.microsoft.com/office/powerpoint/2010/main" val="162969357"/>
       </p:ext>
     </p:extLst>
   </p:cSld>
@@ -6818,7 +6818,7 @@
           <p:cNvPr id="16" name="">
             <a:extLst xmlns:a="http://schemas.openxmlformats.org/drawingml/2006/main">
               <a:ext uri="{FF2B5EF4-FFF2-40B4-BE49-F238E27FC236}">
-                <a16:creationId xmlns:a16="http://schemas.microsoft.com/office/drawing/2014/main" id="{9F660780-ADF0-40AE-9565-85A61B184F5A}"/>
+                <a16:creationId xmlns:a16="http://schemas.microsoft.com/office/drawing/2014/main" id="{57BF2D1E-E7C4-40E3-AFED-3BEE1BB1B76D}"/>
               </a:ext>
             </a:extLst>
           </p:cNvPr>
@@ -6850,7 +6850,7 @@
           <p:cNvPr id="2" name="">
             <a:extLst xmlns:a="http://schemas.openxmlformats.org/drawingml/2006/main">
               <a:ext uri="{FF2B5EF4-FFF2-40B4-BE49-F238E27FC236}">
-                <a16:creationId xmlns:a16="http://schemas.microsoft.com/office/drawing/2014/main" id="{7D9326B2-9AD9-4ABE-82E6-C9FF8E86973B}"/>
+                <a16:creationId xmlns:a16="http://schemas.microsoft.com/office/drawing/2014/main" id="{3EB04851-974C-44BB-BB54-E211459F5762}"/>
               </a:ext>
             </a:extLst>
           </p:cNvPr>
@@ -6907,7 +6907,7 @@
           <p:cNvPr id="3" name="">
             <a:extLst xmlns:a="http://schemas.openxmlformats.org/drawingml/2006/main">
               <a:ext uri="{FF2B5EF4-FFF2-40B4-BE49-F238E27FC236}">
-                <a16:creationId xmlns:a16="http://schemas.microsoft.com/office/drawing/2014/main" id="{7C64B391-C450-4784-BF86-91E826C720A9}"/>
+                <a16:creationId xmlns:a16="http://schemas.microsoft.com/office/drawing/2014/main" id="{7494A1F8-5786-4622-8E40-A543C9E4E87C}"/>
               </a:ext>
             </a:extLst>
           </p:cNvPr>
@@ -6939,7 +6939,7 @@
           <p:cNvPr id="4" name="">
             <a:extLst xmlns:a="http://schemas.openxmlformats.org/drawingml/2006/main">
               <a:ext uri="{FF2B5EF4-FFF2-40B4-BE49-F238E27FC236}">
-                <a16:creationId xmlns:a16="http://schemas.microsoft.com/office/drawing/2014/main" id="{8086C962-D04E-4387-B3DF-B995CAD59C80}"/>
+                <a16:creationId xmlns:a16="http://schemas.microsoft.com/office/drawing/2014/main" id="{F049F519-A942-4DDF-AF29-5FBFBDBD4158}"/>
               </a:ext>
             </a:extLst>
           </p:cNvPr>
@@ -6996,7 +6996,7 @@
           <p:cNvPr id="5" name="">
             <a:extLst xmlns:a="http://schemas.openxmlformats.org/drawingml/2006/main">
               <a:ext uri="{FF2B5EF4-FFF2-40B4-BE49-F238E27FC236}">
-                <a16:creationId xmlns:a16="http://schemas.microsoft.com/office/drawing/2014/main" id="{C90487FC-0113-4EF7-A66F-BCD4DF639AE3}"/>
+                <a16:creationId xmlns:a16="http://schemas.microsoft.com/office/drawing/2014/main" id="{6555F58E-FCB5-44AA-AAC8-F77BBFE80597}"/>
               </a:ext>
             </a:extLst>
           </p:cNvPr>
@@ -7053,7 +7053,7 @@
           <p:cNvPr id="6" name="">
             <a:extLst xmlns:a="http://schemas.openxmlformats.org/drawingml/2006/main">
               <a:ext uri="{FF2B5EF4-FFF2-40B4-BE49-F238E27FC236}">
-                <a16:creationId xmlns:a16="http://schemas.microsoft.com/office/drawing/2014/main" id="{7A7A7C95-2F99-4E1C-B708-C72C68C9DBF0}"/>
+                <a16:creationId xmlns:a16="http://schemas.microsoft.com/office/drawing/2014/main" id="{4697F1E3-119C-4933-A5F3-A31758C3DC05}"/>
               </a:ext>
             </a:extLst>
           </p:cNvPr>
@@ -7110,7 +7110,7 @@
           <p:cNvPr id="7" name="">
             <a:extLst xmlns:a="http://schemas.openxmlformats.org/drawingml/2006/main">
               <a:ext uri="{FF2B5EF4-FFF2-40B4-BE49-F238E27FC236}">
-                <a16:creationId xmlns:a16="http://schemas.microsoft.com/office/drawing/2014/main" id="{AE160322-8810-4F2C-9557-F93E3E1AECDA}"/>
+                <a16:creationId xmlns:a16="http://schemas.microsoft.com/office/drawing/2014/main" id="{5FA4E73B-0591-4DFC-9643-61C25AA92C25}"/>
               </a:ext>
             </a:extLst>
           </p:cNvPr>
@@ -7142,7 +7142,7 @@
           <p:cNvPr id="8" name="">
             <a:extLst xmlns:a="http://schemas.openxmlformats.org/drawingml/2006/main">
               <a:ext uri="{FF2B5EF4-FFF2-40B4-BE49-F238E27FC236}">
-                <a16:creationId xmlns:a16="http://schemas.microsoft.com/office/drawing/2014/main" id="{7981B351-86D9-4CAA-8A94-9E6AA41362EB}"/>
+                <a16:creationId xmlns:a16="http://schemas.microsoft.com/office/drawing/2014/main" id="{14766920-4D3D-49DF-AEDA-03B27A04B081}"/>
               </a:ext>
             </a:extLst>
           </p:cNvPr>
@@ -7199,7 +7199,7 @@
           <p:cNvPr id="9" name="">
             <a:extLst xmlns:a="http://schemas.openxmlformats.org/drawingml/2006/main">
               <a:ext uri="{FF2B5EF4-FFF2-40B4-BE49-F238E27FC236}">
-                <a16:creationId xmlns:a16="http://schemas.microsoft.com/office/drawing/2014/main" id="{F2A9B024-B28C-47FD-89CC-8FD6E0334870}"/>
+                <a16:creationId xmlns:a16="http://schemas.microsoft.com/office/drawing/2014/main" id="{73BF2CD0-7C08-4F53-884A-FB5B3CD9A517}"/>
               </a:ext>
             </a:extLst>
           </p:cNvPr>
@@ -7256,7 +7256,7 @@
           <p:cNvPr id="10" name="">
             <a:extLst xmlns:a="http://schemas.openxmlformats.org/drawingml/2006/main">
               <a:ext uri="{FF2B5EF4-FFF2-40B4-BE49-F238E27FC236}">
-                <a16:creationId xmlns:a16="http://schemas.microsoft.com/office/drawing/2014/main" id="{399D7DC9-9063-431A-8815-511C2A694B78}"/>
+                <a16:creationId xmlns:a16="http://schemas.microsoft.com/office/drawing/2014/main" id="{F9190680-F0FE-4B1C-9FFE-AB18B4B5B506}"/>
               </a:ext>
             </a:extLst>
           </p:cNvPr>
@@ -7313,7 +7313,7 @@
           <p:cNvPr id="11" name="">
             <a:extLst xmlns:a="http://schemas.openxmlformats.org/drawingml/2006/main">
               <a:ext uri="{FF2B5EF4-FFF2-40B4-BE49-F238E27FC236}">
-                <a16:creationId xmlns:a16="http://schemas.microsoft.com/office/drawing/2014/main" id="{3CF81AB6-1093-4969-ACEA-7E34979B38C7}"/>
+                <a16:creationId xmlns:a16="http://schemas.microsoft.com/office/drawing/2014/main" id="{B65B9FEF-E25C-4806-B99F-381F3550587F}"/>
               </a:ext>
             </a:extLst>
           </p:cNvPr>
@@ -7345,7 +7345,7 @@
           <p:cNvPr id="12" name="">
             <a:extLst xmlns:a="http://schemas.openxmlformats.org/drawingml/2006/main">
               <a:ext uri="{FF2B5EF4-FFF2-40B4-BE49-F238E27FC236}">
-                <a16:creationId xmlns:a16="http://schemas.microsoft.com/office/drawing/2014/main" id="{A807106B-D550-44E3-A489-F27CB951F375}"/>
+                <a16:creationId xmlns:a16="http://schemas.microsoft.com/office/drawing/2014/main" id="{A13D7C81-E78F-4F78-9D98-CC457BE83A7F}"/>
               </a:ext>
             </a:extLst>
           </p:cNvPr>
@@ -7402,7 +7402,7 @@
           <p:cNvPr id="13" name="">
             <a:extLst xmlns:a="http://schemas.openxmlformats.org/drawingml/2006/main">
               <a:ext uri="{FF2B5EF4-FFF2-40B4-BE49-F238E27FC236}">
-                <a16:creationId xmlns:a16="http://schemas.microsoft.com/office/drawing/2014/main" id="{E31ED6DB-2705-4C4E-B99B-1CF09964E8C4}"/>
+                <a16:creationId xmlns:a16="http://schemas.microsoft.com/office/drawing/2014/main" id="{3C6A431D-D1FB-4994-8FEC-02E88D528B50}"/>
               </a:ext>
             </a:extLst>
           </p:cNvPr>
@@ -7459,7 +7459,7 @@
           <p:cNvPr id="14" name="">
             <a:extLst xmlns:a="http://schemas.openxmlformats.org/drawingml/2006/main">
               <a:ext uri="{FF2B5EF4-FFF2-40B4-BE49-F238E27FC236}">
-                <a16:creationId xmlns:a16="http://schemas.microsoft.com/office/drawing/2014/main" id="{E3B5C351-C637-4778-BAB9-575F6FDB6548}"/>
+                <a16:creationId xmlns:a16="http://schemas.microsoft.com/office/drawing/2014/main" id="{B657022E-3FB5-4691-8550-D8D3303E6C6C}"/>
               </a:ext>
             </a:extLst>
           </p:cNvPr>
@@ -7516,7 +7516,7 @@
           <p:cNvPr id="15" name="">
             <a:extLst xmlns:a="http://schemas.openxmlformats.org/drawingml/2006/main">
               <a:ext uri="{FF2B5EF4-FFF2-40B4-BE49-F238E27FC236}">
-                <a16:creationId xmlns:a16="http://schemas.microsoft.com/office/drawing/2014/main" id="{4854C931-FA18-4106-AE8A-52A2440111A0}"/>
+                <a16:creationId xmlns:a16="http://schemas.microsoft.com/office/drawing/2014/main" id="{F3268E06-05D4-4992-B08E-15493A88E754}"/>
               </a:ext>
             </a:extLst>
           </p:cNvPr>
@@ -7571,7 +7571,7 @@
     </p:spTree>
     <p:extLst>
       <p:ext uri="{BB962C8B-B14F-4D97-AF65-F5344CB8AC3E}">
-        <p14:creationId xmlns:p14="http://schemas.microsoft.com/office/powerpoint/2010/main" val="1901814634"/>
+        <p14:creationId xmlns:p14="http://schemas.microsoft.com/office/powerpoint/2010/main" val="1898262180"/>
       </p:ext>
     </p:extLst>
   </p:cSld>
@@ -7772,7 +7772,7 @@
           <p:cNvPr id="23" name="">
             <a:extLst xmlns:a="http://schemas.openxmlformats.org/drawingml/2006/main">
               <a:ext uri="{FF2B5EF4-FFF2-40B4-BE49-F238E27FC236}">
-                <a16:creationId xmlns:a16="http://schemas.microsoft.com/office/drawing/2014/main" id="{26D9BB52-785B-4ABB-BAC7-6EB80D054BCE}"/>
+                <a16:creationId xmlns:a16="http://schemas.microsoft.com/office/drawing/2014/main" id="{A48199E8-EF6D-4ED3-8306-6E63B401F8CE}"/>
               </a:ext>
             </a:extLst>
           </p:cNvPr>
@@ -7804,7 +7804,7 @@
           <p:cNvPr id="2" name="">
             <a:extLst xmlns:a="http://schemas.openxmlformats.org/drawingml/2006/main">
               <a:ext uri="{FF2B5EF4-FFF2-40B4-BE49-F238E27FC236}">
-                <a16:creationId xmlns:a16="http://schemas.microsoft.com/office/drawing/2014/main" id="{9EACA5DF-DD59-47F6-B8D4-0566049F70C4}"/>
+                <a16:creationId xmlns:a16="http://schemas.microsoft.com/office/drawing/2014/main" id="{E7508E84-BCF8-4514-97B5-9DEE28290D05}"/>
               </a:ext>
             </a:extLst>
           </p:cNvPr>
@@ -7861,7 +7861,7 @@
           <p:cNvPr id="3" name="">
             <a:extLst xmlns:a="http://schemas.openxmlformats.org/drawingml/2006/main">
               <a:ext uri="{FF2B5EF4-FFF2-40B4-BE49-F238E27FC236}">
-                <a16:creationId xmlns:a16="http://schemas.microsoft.com/office/drawing/2014/main" id="{D12CB717-F2FE-4BD4-B4B2-88BB2C1CB6DA}"/>
+                <a16:creationId xmlns:a16="http://schemas.microsoft.com/office/drawing/2014/main" id="{4FF68E3C-9AAE-4F36-BB26-5062BDD80C42}"/>
               </a:ext>
             </a:extLst>
           </p:cNvPr>
@@ -7893,7 +7893,7 @@
           <p:cNvPr id="4" name="">
             <a:extLst xmlns:a="http://schemas.openxmlformats.org/drawingml/2006/main">
               <a:ext uri="{FF2B5EF4-FFF2-40B4-BE49-F238E27FC236}">
-                <a16:creationId xmlns:a16="http://schemas.microsoft.com/office/drawing/2014/main" id="{4EDD6B45-B6B1-4611-83F6-25B21F5EC1F3}"/>
+                <a16:creationId xmlns:a16="http://schemas.microsoft.com/office/drawing/2014/main" id="{55375BED-79BD-44D7-8621-FF95C1A395F4}"/>
               </a:ext>
             </a:extLst>
           </p:cNvPr>
@@ -7950,7 +7950,7 @@
           <p:cNvPr id="5" name="">
             <a:extLst xmlns:a="http://schemas.openxmlformats.org/drawingml/2006/main">
               <a:ext uri="{FF2B5EF4-FFF2-40B4-BE49-F238E27FC236}">
-                <a16:creationId xmlns:a16="http://schemas.microsoft.com/office/drawing/2014/main" id="{0E39198E-1323-43D4-A5A0-EB1B073881EA}"/>
+                <a16:creationId xmlns:a16="http://schemas.microsoft.com/office/drawing/2014/main" id="{AAC677EA-2C5E-4FD6-B32A-BBACD0B91BA9}"/>
               </a:ext>
             </a:extLst>
           </p:cNvPr>
@@ -8007,7 +8007,7 @@
           <p:cNvPr id="6" name="">
             <a:extLst xmlns:a="http://schemas.openxmlformats.org/drawingml/2006/main">
               <a:ext uri="{FF2B5EF4-FFF2-40B4-BE49-F238E27FC236}">
-                <a16:creationId xmlns:a16="http://schemas.microsoft.com/office/drawing/2014/main" id="{C035F3CC-7EEF-4319-A9A0-D1C6BD464D4F}"/>
+                <a16:creationId xmlns:a16="http://schemas.microsoft.com/office/drawing/2014/main" id="{3E7866DF-E9C8-4201-BC45-BBBFBB6652A8}"/>
               </a:ext>
             </a:extLst>
           </p:cNvPr>
@@ -8064,7 +8064,7 @@
           <p:cNvPr id="7" name="">
             <a:extLst xmlns:a="http://schemas.openxmlformats.org/drawingml/2006/main">
               <a:ext uri="{FF2B5EF4-FFF2-40B4-BE49-F238E27FC236}">
-                <a16:creationId xmlns:a16="http://schemas.microsoft.com/office/drawing/2014/main" id="{FFF95B44-1448-4B06-A94E-0E6867F6E7AA}"/>
+                <a16:creationId xmlns:a16="http://schemas.microsoft.com/office/drawing/2014/main" id="{626E703E-9C2E-43ED-B002-72E8E911E8BB}"/>
               </a:ext>
             </a:extLst>
           </p:cNvPr>
@@ -8096,7 +8096,7 @@
           <p:cNvPr id="8" name="">
             <a:extLst xmlns:a="http://schemas.openxmlformats.org/drawingml/2006/main">
               <a:ext uri="{FF2B5EF4-FFF2-40B4-BE49-F238E27FC236}">
-                <a16:creationId xmlns:a16="http://schemas.microsoft.com/office/drawing/2014/main" id="{8535204A-5A71-4D95-8103-9B4EFFDCC343}"/>
+                <a16:creationId xmlns:a16="http://schemas.microsoft.com/office/drawing/2014/main" id="{3E704E57-5A06-47D5-B276-BFAA7DC67FB8}"/>
               </a:ext>
             </a:extLst>
           </p:cNvPr>
@@ -8153,7 +8153,7 @@
           <p:cNvPr id="9" name="">
             <a:extLst xmlns:a="http://schemas.openxmlformats.org/drawingml/2006/main">
               <a:ext uri="{FF2B5EF4-FFF2-40B4-BE49-F238E27FC236}">
-                <a16:creationId xmlns:a16="http://schemas.microsoft.com/office/drawing/2014/main" id="{D32D2B6F-941F-42F8-8E96-EB8A0DB6ABFB}"/>
+                <a16:creationId xmlns:a16="http://schemas.microsoft.com/office/drawing/2014/main" id="{72CE2AC7-3E00-4B58-9953-35174BB086A0}"/>
               </a:ext>
             </a:extLst>
           </p:cNvPr>
@@ -8210,19 +8210,19 @@
           <p:cNvPr id="10" name="">
             <a:extLst xmlns:a="http://schemas.openxmlformats.org/drawingml/2006/main">
               <a:ext uri="{FF2B5EF4-FFF2-40B4-BE49-F238E27FC236}">
-                <a16:creationId xmlns:a16="http://schemas.microsoft.com/office/drawing/2014/main" id="{E1E62B50-6A64-403A-BD1F-0412226DDC34}"/>
-              </a:ext>
-            </a:extLst>
-          </p:cNvPr>
-          <p:cNvSpPr>
-            <a:spLocks xmlns:a="http://schemas.openxmlformats.org/drawingml/2006/main" noGrp="1"/>
-          </p:cNvSpPr>
-          <p:nvPr/>
-        </p:nvSpPr>
-        <p:spPr>
-          <a:xfrm xmlns:a="http://schemas.openxmlformats.org/drawingml/2006/main">
-            <a:off x="914400" y="1257300"/>
-            <a:ext cx="10363200" cy="781050"/>
+                <a16:creationId xmlns:a16="http://schemas.microsoft.com/office/drawing/2014/main" id="{F4322F7C-8138-4A59-A6FC-3F76ADBE1B0C}"/>
+              </a:ext>
+            </a:extLst>
+          </p:cNvPr>
+          <p:cNvSpPr>
+            <a:spLocks xmlns:a="http://schemas.openxmlformats.org/drawingml/2006/main" noGrp="1"/>
+          </p:cNvSpPr>
+          <p:nvPr/>
+        </p:nvSpPr>
+        <p:spPr>
+          <a:xfrm xmlns:a="http://schemas.openxmlformats.org/drawingml/2006/main">
+            <a:off x="857250" y="1219200"/>
+            <a:ext cx="10477500" cy="742950"/>
           </a:xfrm>
           <a:prstGeom xmlns:a="http://schemas.openxmlformats.org/drawingml/2006/main" prst="rect">
             <a:avLst/>
@@ -8239,7 +8239,7 @@
           <a:lstStyle xmlns:a="http://schemas.openxmlformats.org/drawingml/2006/main"/>
           <a:p xmlns:a="http://schemas.openxmlformats.org/drawingml/2006/main">
             <a:pPr algn="ctr">
-              <a:defRPr sz="2175" b="1">
+              <a:defRPr sz="2100" b="1">
                 <a:solidFill>
                   <a:srgbClr val="17253A"/>
                 </a:solidFill>
@@ -8249,7 +8249,7 @@
               </a:defRPr>
             </a:pPr>
             <a:r>
-              <a:rPr sz="2175" b="1">
+              <a:rPr sz="2100" b="1">
                 <a:solidFill>
                   <a:srgbClr val="17253A"/>
                 </a:solidFill>
@@ -8267,28 +8267,30 @@
           <p:cNvPr id="11" name="">
             <a:extLst xmlns:a="http://schemas.openxmlformats.org/drawingml/2006/main">
               <a:ext uri="{FF2B5EF4-FFF2-40B4-BE49-F238E27FC236}">
-                <a16:creationId xmlns:a16="http://schemas.microsoft.com/office/drawing/2014/main" id="{74E92291-D5D3-4421-B886-D843FFBBD6AF}"/>
-              </a:ext>
-            </a:extLst>
-          </p:cNvPr>
-          <p:cNvSpPr>
-            <a:spLocks xmlns:a="http://schemas.openxmlformats.org/drawingml/2006/main" noGrp="1"/>
-          </p:cNvSpPr>
-          <p:nvPr/>
-        </p:nvSpPr>
-        <p:spPr>
-          <a:xfrm xmlns:a="http://schemas.openxmlformats.org/drawingml/2006/main">
-            <a:off x="1000125" y="2247900"/>
-            <a:ext cx="476250" cy="476250"/>
-          </a:xfrm>
-          <a:prstGeom xmlns:a="http://schemas.openxmlformats.org/drawingml/2006/main" prst="ellipse">
+                <a16:creationId xmlns:a16="http://schemas.microsoft.com/office/drawing/2014/main" id="{2F348340-3DBB-4BFF-945D-AB3F51300EB8}"/>
+              </a:ext>
+            </a:extLst>
+          </p:cNvPr>
+          <p:cNvSpPr>
+            <a:spLocks xmlns:a="http://schemas.openxmlformats.org/drawingml/2006/main" noGrp="1"/>
+          </p:cNvSpPr>
+          <p:nvPr/>
+        </p:nvSpPr>
+        <p:spPr>
+          <a:xfrm xmlns:a="http://schemas.openxmlformats.org/drawingml/2006/main">
+            <a:off x="971550" y="2124075"/>
+            <a:ext cx="38100" cy="3524250"/>
+          </a:xfrm>
+          <a:prstGeom xmlns:a="http://schemas.openxmlformats.org/drawingml/2006/main" prst="rect">
             <a:avLst/>
           </a:prstGeom>
           <a:solidFill xmlns:a="http://schemas.openxmlformats.org/drawingml/2006/main">
-            <a:srgbClr val="18324A"/>
+            <a:srgbClr val="2C6E73"/>
           </a:solidFill>
           <a:ln xmlns:a="http://schemas.openxmlformats.org/drawingml/2006/main" w="0">
-            <a:noFill/>
+            <a:solidFill>
+              <a:srgbClr val="2C6E73"/>
+            </a:solidFill>
           </a:ln>
         </p:spPr>
       </p:sp>
@@ -8297,19 +8299,19 @@
           <p:cNvPr id="12" name="">
             <a:extLst xmlns:a="http://schemas.openxmlformats.org/drawingml/2006/main">
               <a:ext uri="{FF2B5EF4-FFF2-40B4-BE49-F238E27FC236}">
-                <a16:creationId xmlns:a16="http://schemas.microsoft.com/office/drawing/2014/main" id="{880505FB-8632-48BD-826B-83884C249A11}"/>
-              </a:ext>
-            </a:extLst>
-          </p:cNvPr>
-          <p:cNvSpPr>
-            <a:spLocks xmlns:a="http://schemas.openxmlformats.org/drawingml/2006/main" noGrp="1"/>
-          </p:cNvSpPr>
-          <p:nvPr/>
-        </p:nvSpPr>
-        <p:spPr>
-          <a:xfrm xmlns:a="http://schemas.openxmlformats.org/drawingml/2006/main">
-            <a:off x="1000125" y="2276475"/>
-            <a:ext cx="476250" cy="419100"/>
+                <a16:creationId xmlns:a16="http://schemas.microsoft.com/office/drawing/2014/main" id="{F3395E17-984C-4C2E-8B43-CC6E1E79863A}"/>
+              </a:ext>
+            </a:extLst>
+          </p:cNvPr>
+          <p:cNvSpPr>
+            <a:spLocks xmlns:a="http://schemas.openxmlformats.org/drawingml/2006/main" noGrp="1"/>
+          </p:cNvSpPr>
+          <p:nvPr/>
+        </p:nvSpPr>
+        <p:spPr>
+          <a:xfrm xmlns:a="http://schemas.openxmlformats.org/drawingml/2006/main">
+            <a:off x="1162050" y="2200275"/>
+            <a:ext cx="400050" cy="400050"/>
           </a:xfrm>
           <a:prstGeom xmlns:a="http://schemas.openxmlformats.org/drawingml/2006/main" prst="rect">
             <a:avLst/>
@@ -8326,9 +8328,9 @@
           <a:lstStyle xmlns:a="http://schemas.openxmlformats.org/drawingml/2006/main"/>
           <a:p xmlns:a="http://schemas.openxmlformats.org/drawingml/2006/main">
             <a:pPr algn="ctr">
-              <a:defRPr sz="1350" b="1">
-                <a:solidFill>
-                  <a:srgbClr val="FFFFFF"/>
+              <a:defRPr sz="1125" b="1">
+                <a:solidFill>
+                  <a:srgbClr val="2C6E73"/>
                 </a:solidFill>
                 <a:latin typeface="Arial"/>
                 <a:ea typeface="Arial"/>
@@ -8336,9 +8338,9 @@
               </a:defRPr>
             </a:pPr>
             <a:r>
-              <a:rPr sz="1350" b="1">
-                <a:solidFill>
-                  <a:srgbClr val="FFFFFF"/>
+              <a:rPr sz="1125" b="1">
+                <a:solidFill>
+                  <a:srgbClr val="2C6E73"/>
                 </a:solidFill>
                 <a:latin typeface="Arial"/>
                 <a:ea typeface="Arial"/>
@@ -8354,19 +8356,19 @@
           <p:cNvPr id="13" name="">
             <a:extLst xmlns:a="http://schemas.openxmlformats.org/drawingml/2006/main">
               <a:ext uri="{FF2B5EF4-FFF2-40B4-BE49-F238E27FC236}">
-                <a16:creationId xmlns:a16="http://schemas.microsoft.com/office/drawing/2014/main" id="{54BEF2AA-F361-4AC9-8273-BF155F8FCC30}"/>
-              </a:ext>
-            </a:extLst>
-          </p:cNvPr>
-          <p:cNvSpPr>
-            <a:spLocks xmlns:a="http://schemas.openxmlformats.org/drawingml/2006/main" noGrp="1"/>
-          </p:cNvSpPr>
-          <p:nvPr/>
-        </p:nvSpPr>
-        <p:spPr>
-          <a:xfrm xmlns:a="http://schemas.openxmlformats.org/drawingml/2006/main">
-            <a:off x="1714500" y="2181225"/>
-            <a:ext cx="9429750" cy="609600"/>
+                <a16:creationId xmlns:a16="http://schemas.microsoft.com/office/drawing/2014/main" id="{DE3CE83B-CF78-4EE6-A91D-32C216D68B6C}"/>
+              </a:ext>
+            </a:extLst>
+          </p:cNvPr>
+          <p:cNvSpPr>
+            <a:spLocks xmlns:a="http://schemas.openxmlformats.org/drawingml/2006/main" noGrp="1"/>
+          </p:cNvSpPr>
+          <p:nvPr/>
+        </p:nvSpPr>
+        <p:spPr>
+          <a:xfrm xmlns:a="http://schemas.openxmlformats.org/drawingml/2006/main">
+            <a:off x="1714500" y="2114550"/>
+            <a:ext cx="9525000" cy="809625"/>
           </a:xfrm>
           <a:prstGeom xmlns:a="http://schemas.openxmlformats.org/drawingml/2006/main" prst="rect">
             <a:avLst/>
@@ -8383,7 +8385,7 @@
           <a:lstStyle xmlns:a="http://schemas.openxmlformats.org/drawingml/2006/main"/>
           <a:p xmlns:a="http://schemas.openxmlformats.org/drawingml/2006/main">
             <a:pPr algn="l">
-              <a:defRPr sz="1500" b="0">
+              <a:defRPr sz="1725" b="0">
                 <a:solidFill>
                   <a:srgbClr val="17253A"/>
                 </a:solidFill>
@@ -8393,7 +8395,7 @@
               </a:defRPr>
             </a:pPr>
             <a:r>
-              <a:rPr sz="1500" b="0">
+              <a:rPr sz="1725" b="0">
                 <a:solidFill>
                   <a:srgbClr val="17253A"/>
                 </a:solidFill>
@@ -8401,7 +8403,7 @@
                 <a:ea typeface="Arial"/>
                 <a:cs typeface="Arial"/>
               </a:rPr>
-              <a:t>Identify the structure: Identify the number type and choose an efficient method.</a:t>
+              <a:t>638,475 + 274,806 = 913,281</a:t>
             </a:r>
           </a:p>
         </p:txBody>
@@ -8411,28 +8413,30 @@
           <p:cNvPr id="14" name="">
             <a:extLst xmlns:a="http://schemas.openxmlformats.org/drawingml/2006/main">
               <a:ext uri="{FF2B5EF4-FFF2-40B4-BE49-F238E27FC236}">
-                <a16:creationId xmlns:a16="http://schemas.microsoft.com/office/drawing/2014/main" id="{B74C6DA6-4B0B-465C-B06E-252DD42D277F}"/>
-              </a:ext>
-            </a:extLst>
-          </p:cNvPr>
-          <p:cNvSpPr>
-            <a:spLocks xmlns:a="http://schemas.openxmlformats.org/drawingml/2006/main" noGrp="1"/>
-          </p:cNvSpPr>
-          <p:nvPr/>
-        </p:nvSpPr>
-        <p:spPr>
-          <a:xfrm xmlns:a="http://schemas.openxmlformats.org/drawingml/2006/main">
-            <a:off x="1000125" y="2990850"/>
-            <a:ext cx="476250" cy="476250"/>
-          </a:xfrm>
-          <a:prstGeom xmlns:a="http://schemas.openxmlformats.org/drawingml/2006/main" prst="ellipse">
+                <a16:creationId xmlns:a16="http://schemas.microsoft.com/office/drawing/2014/main" id="{C646673D-D565-4E4D-BE4A-BC950CA78880}"/>
+              </a:ext>
+            </a:extLst>
+          </p:cNvPr>
+          <p:cNvSpPr>
+            <a:spLocks xmlns:a="http://schemas.openxmlformats.org/drawingml/2006/main" noGrp="1"/>
+          </p:cNvSpPr>
+          <p:nvPr/>
+        </p:nvSpPr>
+        <p:spPr>
+          <a:xfrm xmlns:a="http://schemas.openxmlformats.org/drawingml/2006/main">
+            <a:off x="1714500" y="2943225"/>
+            <a:ext cx="9334500" cy="9525"/>
+          </a:xfrm>
+          <a:prstGeom xmlns:a="http://schemas.openxmlformats.org/drawingml/2006/main" prst="rect">
             <a:avLst/>
           </a:prstGeom>
           <a:solidFill xmlns:a="http://schemas.openxmlformats.org/drawingml/2006/main">
-            <a:srgbClr val="2C6E73"/>
+            <a:srgbClr val="D9E0E6"/>
           </a:solidFill>
           <a:ln xmlns:a="http://schemas.openxmlformats.org/drawingml/2006/main" w="0">
-            <a:noFill/>
+            <a:solidFill>
+              <a:srgbClr val="D9E0E6"/>
+            </a:solidFill>
           </a:ln>
         </p:spPr>
       </p:sp>
@@ -8441,19 +8445,19 @@
           <p:cNvPr id="15" name="">
             <a:extLst xmlns:a="http://schemas.openxmlformats.org/drawingml/2006/main">
               <a:ext uri="{FF2B5EF4-FFF2-40B4-BE49-F238E27FC236}">
-                <a16:creationId xmlns:a16="http://schemas.microsoft.com/office/drawing/2014/main" id="{BBBB4223-5FBA-42A0-9AA7-03C8D7896F48}"/>
-              </a:ext>
-            </a:extLst>
-          </p:cNvPr>
-          <p:cNvSpPr>
-            <a:spLocks xmlns:a="http://schemas.openxmlformats.org/drawingml/2006/main" noGrp="1"/>
-          </p:cNvSpPr>
-          <p:nvPr/>
-        </p:nvSpPr>
-        <p:spPr>
-          <a:xfrm xmlns:a="http://schemas.openxmlformats.org/drawingml/2006/main">
-            <a:off x="1000125" y="3019425"/>
-            <a:ext cx="476250" cy="419100"/>
+                <a16:creationId xmlns:a16="http://schemas.microsoft.com/office/drawing/2014/main" id="{BB9168AA-D949-409E-A020-2057CF8A0B29}"/>
+              </a:ext>
+            </a:extLst>
+          </p:cNvPr>
+          <p:cNvSpPr>
+            <a:spLocks xmlns:a="http://schemas.openxmlformats.org/drawingml/2006/main" noGrp="1"/>
+          </p:cNvSpPr>
+          <p:nvPr/>
+        </p:nvSpPr>
+        <p:spPr>
+          <a:xfrm xmlns:a="http://schemas.openxmlformats.org/drawingml/2006/main">
+            <a:off x="1162050" y="3076575"/>
+            <a:ext cx="400050" cy="400050"/>
           </a:xfrm>
           <a:prstGeom xmlns:a="http://schemas.openxmlformats.org/drawingml/2006/main" prst="rect">
             <a:avLst/>
@@ -8470,9 +8474,9 @@
           <a:lstStyle xmlns:a="http://schemas.openxmlformats.org/drawingml/2006/main"/>
           <a:p xmlns:a="http://schemas.openxmlformats.org/drawingml/2006/main">
             <a:pPr algn="ctr">
-              <a:defRPr sz="1350" b="1">
-                <a:solidFill>
-                  <a:srgbClr val="FFFFFF"/>
+              <a:defRPr sz="1125" b="1">
+                <a:solidFill>
+                  <a:srgbClr val="2C6E73"/>
                 </a:solidFill>
                 <a:latin typeface="Arial"/>
                 <a:ea typeface="Arial"/>
@@ -8480,9 +8484,9 @@
               </a:defRPr>
             </a:pPr>
             <a:r>
-              <a:rPr sz="1350" b="1">
-                <a:solidFill>
-                  <a:srgbClr val="FFFFFF"/>
+              <a:rPr sz="1125" b="1">
+                <a:solidFill>
+                  <a:srgbClr val="2C6E73"/>
                 </a:solidFill>
                 <a:latin typeface="Arial"/>
                 <a:ea typeface="Arial"/>
@@ -8498,19 +8502,19 @@
           <p:cNvPr id="16" name="">
             <a:extLst xmlns:a="http://schemas.openxmlformats.org/drawingml/2006/main">
               <a:ext uri="{FF2B5EF4-FFF2-40B4-BE49-F238E27FC236}">
-                <a16:creationId xmlns:a16="http://schemas.microsoft.com/office/drawing/2014/main" id="{CB44E19C-7267-471C-8B53-C21E5859E8C1}"/>
-              </a:ext>
-            </a:extLst>
-          </p:cNvPr>
-          <p:cNvSpPr>
-            <a:spLocks xmlns:a="http://schemas.openxmlformats.org/drawingml/2006/main" noGrp="1"/>
-          </p:cNvSpPr>
-          <p:nvPr/>
-        </p:nvSpPr>
-        <p:spPr>
-          <a:xfrm xmlns:a="http://schemas.openxmlformats.org/drawingml/2006/main">
-            <a:off x="1714500" y="2924175"/>
-            <a:ext cx="9429750" cy="609600"/>
+                <a16:creationId xmlns:a16="http://schemas.microsoft.com/office/drawing/2014/main" id="{C86F0573-B34E-4B73-BC3F-F83947583059}"/>
+              </a:ext>
+            </a:extLst>
+          </p:cNvPr>
+          <p:cNvSpPr>
+            <a:spLocks xmlns:a="http://schemas.openxmlformats.org/drawingml/2006/main" noGrp="1"/>
+          </p:cNvSpPr>
+          <p:nvPr/>
+        </p:nvSpPr>
+        <p:spPr>
+          <a:xfrm xmlns:a="http://schemas.openxmlformats.org/drawingml/2006/main">
+            <a:off x="1714500" y="2990850"/>
+            <a:ext cx="9525000" cy="809625"/>
           </a:xfrm>
           <a:prstGeom xmlns:a="http://schemas.openxmlformats.org/drawingml/2006/main" prst="rect">
             <a:avLst/>
@@ -8527,7 +8531,7 @@
           <a:lstStyle xmlns:a="http://schemas.openxmlformats.org/drawingml/2006/main"/>
           <a:p xmlns:a="http://schemas.openxmlformats.org/drawingml/2006/main">
             <a:pPr algn="l">
-              <a:defRPr sz="1500" b="0">
+              <a:defRPr sz="1725" b="0">
                 <a:solidFill>
                   <a:srgbClr val="17253A"/>
                 </a:solidFill>
@@ -8537,7 +8541,7 @@
               </a:defRPr>
             </a:pPr>
             <a:r>
-              <a:rPr sz="1500" b="0">
+              <a:rPr sz="1725" b="0">
                 <a:solidFill>
                   <a:srgbClr val="17253A"/>
                 </a:solidFill>
@@ -8545,7 +8549,7 @@
                 <a:ea typeface="Arial"/>
                 <a:cs typeface="Arial"/>
               </a:rPr>
-              <a:t>Set up the method: Keep place values or denominators aligned and record each stage.</a:t>
+              <a:t>902,140 - 386,759 = 515,381</a:t>
             </a:r>
           </a:p>
         </p:txBody>
@@ -8555,28 +8559,30 @@
           <p:cNvPr id="17" name="">
             <a:extLst xmlns:a="http://schemas.openxmlformats.org/drawingml/2006/main">
               <a:ext uri="{FF2B5EF4-FFF2-40B4-BE49-F238E27FC236}">
-                <a16:creationId xmlns:a16="http://schemas.microsoft.com/office/drawing/2014/main" id="{3D3CA222-E00C-40BD-A2B6-845C777627A2}"/>
-              </a:ext>
-            </a:extLst>
-          </p:cNvPr>
-          <p:cNvSpPr>
-            <a:spLocks xmlns:a="http://schemas.openxmlformats.org/drawingml/2006/main" noGrp="1"/>
-          </p:cNvSpPr>
-          <p:nvPr/>
-        </p:nvSpPr>
-        <p:spPr>
-          <a:xfrm xmlns:a="http://schemas.openxmlformats.org/drawingml/2006/main">
-            <a:off x="1000125" y="3733800"/>
-            <a:ext cx="476250" cy="476250"/>
-          </a:xfrm>
-          <a:prstGeom xmlns:a="http://schemas.openxmlformats.org/drawingml/2006/main" prst="ellipse">
+                <a16:creationId xmlns:a16="http://schemas.microsoft.com/office/drawing/2014/main" id="{625FDAA9-5E41-4272-8C63-87AF91E28F2C}"/>
+              </a:ext>
+            </a:extLst>
+          </p:cNvPr>
+          <p:cNvSpPr>
+            <a:spLocks xmlns:a="http://schemas.openxmlformats.org/drawingml/2006/main" noGrp="1"/>
+          </p:cNvSpPr>
+          <p:nvPr/>
+        </p:nvSpPr>
+        <p:spPr>
+          <a:xfrm xmlns:a="http://schemas.openxmlformats.org/drawingml/2006/main">
+            <a:off x="1714500" y="3819525"/>
+            <a:ext cx="9334500" cy="9525"/>
+          </a:xfrm>
+          <a:prstGeom xmlns:a="http://schemas.openxmlformats.org/drawingml/2006/main" prst="rect">
             <a:avLst/>
           </a:prstGeom>
           <a:solidFill xmlns:a="http://schemas.openxmlformats.org/drawingml/2006/main">
-            <a:srgbClr val="2C6E73"/>
+            <a:srgbClr val="D9E0E6"/>
           </a:solidFill>
           <a:ln xmlns:a="http://schemas.openxmlformats.org/drawingml/2006/main" w="0">
-            <a:noFill/>
+            <a:solidFill>
+              <a:srgbClr val="D9E0E6"/>
+            </a:solidFill>
           </a:ln>
         </p:spPr>
       </p:sp>
@@ -8585,19 +8591,19 @@
           <p:cNvPr id="18" name="">
             <a:extLst xmlns:a="http://schemas.openxmlformats.org/drawingml/2006/main">
               <a:ext uri="{FF2B5EF4-FFF2-40B4-BE49-F238E27FC236}">
-                <a16:creationId xmlns:a16="http://schemas.microsoft.com/office/drawing/2014/main" id="{ACF8A387-85F0-449E-9F10-3A2F71152052}"/>
-              </a:ext>
-            </a:extLst>
-          </p:cNvPr>
-          <p:cNvSpPr>
-            <a:spLocks xmlns:a="http://schemas.openxmlformats.org/drawingml/2006/main" noGrp="1"/>
-          </p:cNvSpPr>
-          <p:nvPr/>
-        </p:nvSpPr>
-        <p:spPr>
-          <a:xfrm xmlns:a="http://schemas.openxmlformats.org/drawingml/2006/main">
-            <a:off x="1000125" y="3762375"/>
-            <a:ext cx="476250" cy="419100"/>
+                <a16:creationId xmlns:a16="http://schemas.microsoft.com/office/drawing/2014/main" id="{959FC7FD-0548-4D4B-8DE3-40701467AF7E}"/>
+              </a:ext>
+            </a:extLst>
+          </p:cNvPr>
+          <p:cNvSpPr>
+            <a:spLocks xmlns:a="http://schemas.openxmlformats.org/drawingml/2006/main" noGrp="1"/>
+          </p:cNvSpPr>
+          <p:nvPr/>
+        </p:nvSpPr>
+        <p:spPr>
+          <a:xfrm xmlns:a="http://schemas.openxmlformats.org/drawingml/2006/main">
+            <a:off x="1162050" y="3952875"/>
+            <a:ext cx="400050" cy="400050"/>
           </a:xfrm>
           <a:prstGeom xmlns:a="http://schemas.openxmlformats.org/drawingml/2006/main" prst="rect">
             <a:avLst/>
@@ -8614,9 +8620,9 @@
           <a:lstStyle xmlns:a="http://schemas.openxmlformats.org/drawingml/2006/main"/>
           <a:p xmlns:a="http://schemas.openxmlformats.org/drawingml/2006/main">
             <a:pPr algn="ctr">
-              <a:defRPr sz="1350" b="1">
-                <a:solidFill>
-                  <a:srgbClr val="FFFFFF"/>
+              <a:defRPr sz="1125" b="1">
+                <a:solidFill>
+                  <a:srgbClr val="2C6E73"/>
                 </a:solidFill>
                 <a:latin typeface="Arial"/>
                 <a:ea typeface="Arial"/>
@@ -8624,9 +8630,9 @@
               </a:defRPr>
             </a:pPr>
             <a:r>
-              <a:rPr sz="1350" b="1">
-                <a:solidFill>
-                  <a:srgbClr val="FFFFFF"/>
+              <a:rPr sz="1125" b="1">
+                <a:solidFill>
+                  <a:srgbClr val="2C6E73"/>
                 </a:solidFill>
                 <a:latin typeface="Arial"/>
                 <a:ea typeface="Arial"/>
@@ -8642,19 +8648,19 @@
           <p:cNvPr id="19" name="">
             <a:extLst xmlns:a="http://schemas.openxmlformats.org/drawingml/2006/main">
               <a:ext uri="{FF2B5EF4-FFF2-40B4-BE49-F238E27FC236}">
-                <a16:creationId xmlns:a16="http://schemas.microsoft.com/office/drawing/2014/main" id="{B8470FA6-5552-4864-9F9E-8AF311F57196}"/>
-              </a:ext>
-            </a:extLst>
-          </p:cNvPr>
-          <p:cNvSpPr>
-            <a:spLocks xmlns:a="http://schemas.openxmlformats.org/drawingml/2006/main" noGrp="1"/>
-          </p:cNvSpPr>
-          <p:nvPr/>
-        </p:nvSpPr>
-        <p:spPr>
-          <a:xfrm xmlns:a="http://schemas.openxmlformats.org/drawingml/2006/main">
-            <a:off x="1714500" y="3667125"/>
-            <a:ext cx="9429750" cy="609600"/>
+                <a16:creationId xmlns:a16="http://schemas.microsoft.com/office/drawing/2014/main" id="{2E189A87-C62F-47CE-9C68-5A18E5E5281D}"/>
+              </a:ext>
+            </a:extLst>
+          </p:cNvPr>
+          <p:cNvSpPr>
+            <a:spLocks xmlns:a="http://schemas.openxmlformats.org/drawingml/2006/main" noGrp="1"/>
+          </p:cNvSpPr>
+          <p:nvPr/>
+        </p:nvSpPr>
+        <p:spPr>
+          <a:xfrm xmlns:a="http://schemas.openxmlformats.org/drawingml/2006/main">
+            <a:off x="1714500" y="3867150"/>
+            <a:ext cx="9525000" cy="809625"/>
           </a:xfrm>
           <a:prstGeom xmlns:a="http://schemas.openxmlformats.org/drawingml/2006/main" prst="rect">
             <a:avLst/>
@@ -8671,7 +8677,7 @@
           <a:lstStyle xmlns:a="http://schemas.openxmlformats.org/drawingml/2006/main"/>
           <a:p xmlns:a="http://schemas.openxmlformats.org/drawingml/2006/main">
             <a:pPr algn="l">
-              <a:defRPr sz="1500" b="0">
+              <a:defRPr sz="1725" b="0">
                 <a:solidFill>
                   <a:srgbClr val="17253A"/>
                 </a:solidFill>
@@ -8681,7 +8687,7 @@
               </a:defRPr>
             </a:pPr>
             <a:r>
-              <a:rPr sz="1500" b="0">
+              <a:rPr sz="1725" b="0">
                 <a:solidFill>
                   <a:srgbClr val="17253A"/>
                 </a:solidFill>
@@ -8689,7 +8695,7 @@
                 <a:ea typeface="Arial"/>
                 <a:cs typeface="Arial"/>
               </a:rPr>
-              <a:t>Complete the calculation: 913,281 and 515,381.</a:t>
+              <a:t>Check addition: 913,281 - 274,806 = 638,475</a:t>
             </a:r>
           </a:p>
         </p:txBody>
@@ -8699,28 +8705,30 @@
           <p:cNvPr id="20" name="">
             <a:extLst xmlns:a="http://schemas.openxmlformats.org/drawingml/2006/main">
               <a:ext uri="{FF2B5EF4-FFF2-40B4-BE49-F238E27FC236}">
-                <a16:creationId xmlns:a16="http://schemas.microsoft.com/office/drawing/2014/main" id="{BC742496-F710-4193-8CAB-603C96B469BB}"/>
-              </a:ext>
-            </a:extLst>
-          </p:cNvPr>
-          <p:cNvSpPr>
-            <a:spLocks xmlns:a="http://schemas.openxmlformats.org/drawingml/2006/main" noGrp="1"/>
-          </p:cNvSpPr>
-          <p:nvPr/>
-        </p:nvSpPr>
-        <p:spPr>
-          <a:xfrm xmlns:a="http://schemas.openxmlformats.org/drawingml/2006/main">
-            <a:off x="1000125" y="4476750"/>
-            <a:ext cx="476250" cy="476250"/>
-          </a:xfrm>
-          <a:prstGeom xmlns:a="http://schemas.openxmlformats.org/drawingml/2006/main" prst="ellipse">
+                <a16:creationId xmlns:a16="http://schemas.microsoft.com/office/drawing/2014/main" id="{98D020FD-06B2-4F7B-8C8E-FC8D31C86610}"/>
+              </a:ext>
+            </a:extLst>
+          </p:cNvPr>
+          <p:cNvSpPr>
+            <a:spLocks xmlns:a="http://schemas.openxmlformats.org/drawingml/2006/main" noGrp="1"/>
+          </p:cNvSpPr>
+          <p:nvPr/>
+        </p:nvSpPr>
+        <p:spPr>
+          <a:xfrm xmlns:a="http://schemas.openxmlformats.org/drawingml/2006/main">
+            <a:off x="1714500" y="4695825"/>
+            <a:ext cx="9334500" cy="9525"/>
+          </a:xfrm>
+          <a:prstGeom xmlns:a="http://schemas.openxmlformats.org/drawingml/2006/main" prst="rect">
             <a:avLst/>
           </a:prstGeom>
           <a:solidFill xmlns:a="http://schemas.openxmlformats.org/drawingml/2006/main">
-            <a:srgbClr val="2C6E73"/>
+            <a:srgbClr val="D9E0E6"/>
           </a:solidFill>
           <a:ln xmlns:a="http://schemas.openxmlformats.org/drawingml/2006/main" w="0">
-            <a:noFill/>
+            <a:solidFill>
+              <a:srgbClr val="D9E0E6"/>
+            </a:solidFill>
           </a:ln>
         </p:spPr>
       </p:sp>
@@ -8729,19 +8737,19 @@
           <p:cNvPr id="21" name="">
             <a:extLst xmlns:a="http://schemas.openxmlformats.org/drawingml/2006/main">
               <a:ext uri="{FF2B5EF4-FFF2-40B4-BE49-F238E27FC236}">
-                <a16:creationId xmlns:a16="http://schemas.microsoft.com/office/drawing/2014/main" id="{0BA8698E-FF6D-461D-9556-FB456ED319AF}"/>
-              </a:ext>
-            </a:extLst>
-          </p:cNvPr>
-          <p:cNvSpPr>
-            <a:spLocks xmlns:a="http://schemas.openxmlformats.org/drawingml/2006/main" noGrp="1"/>
-          </p:cNvSpPr>
-          <p:nvPr/>
-        </p:nvSpPr>
-        <p:spPr>
-          <a:xfrm xmlns:a="http://schemas.openxmlformats.org/drawingml/2006/main">
-            <a:off x="1000125" y="4505325"/>
-            <a:ext cx="476250" cy="419100"/>
+                <a16:creationId xmlns:a16="http://schemas.microsoft.com/office/drawing/2014/main" id="{19FF66CB-F7E7-4691-A33F-1EEB4EA591A0}"/>
+              </a:ext>
+            </a:extLst>
+          </p:cNvPr>
+          <p:cNvSpPr>
+            <a:spLocks xmlns:a="http://schemas.openxmlformats.org/drawingml/2006/main" noGrp="1"/>
+          </p:cNvSpPr>
+          <p:nvPr/>
+        </p:nvSpPr>
+        <p:spPr>
+          <a:xfrm xmlns:a="http://schemas.openxmlformats.org/drawingml/2006/main">
+            <a:off x="1162050" y="4829175"/>
+            <a:ext cx="400050" cy="400050"/>
           </a:xfrm>
           <a:prstGeom xmlns:a="http://schemas.openxmlformats.org/drawingml/2006/main" prst="rect">
             <a:avLst/>
@@ -8758,9 +8766,9 @@
           <a:lstStyle xmlns:a="http://schemas.openxmlformats.org/drawingml/2006/main"/>
           <a:p xmlns:a="http://schemas.openxmlformats.org/drawingml/2006/main">
             <a:pPr algn="ctr">
-              <a:defRPr sz="1350" b="1">
-                <a:solidFill>
-                  <a:srgbClr val="FFFFFF"/>
+              <a:defRPr sz="1125" b="1">
+                <a:solidFill>
+                  <a:srgbClr val="2F785D"/>
                 </a:solidFill>
                 <a:latin typeface="Arial"/>
                 <a:ea typeface="Arial"/>
@@ -8768,9 +8776,9 @@
               </a:defRPr>
             </a:pPr>
             <a:r>
-              <a:rPr sz="1350" b="1">
-                <a:solidFill>
-                  <a:srgbClr val="FFFFFF"/>
+              <a:rPr sz="1125" b="1">
+                <a:solidFill>
+                  <a:srgbClr val="2F785D"/>
                 </a:solidFill>
                 <a:latin typeface="Arial"/>
                 <a:ea typeface="Arial"/>
@@ -8786,19 +8794,19 @@
           <p:cNvPr id="22" name="">
             <a:extLst xmlns:a="http://schemas.openxmlformats.org/drawingml/2006/main">
               <a:ext uri="{FF2B5EF4-FFF2-40B4-BE49-F238E27FC236}">
-                <a16:creationId xmlns:a16="http://schemas.microsoft.com/office/drawing/2014/main" id="{EADA30E0-6C48-4BE9-853A-D78A33A19253}"/>
-              </a:ext>
-            </a:extLst>
-          </p:cNvPr>
-          <p:cNvSpPr>
-            <a:spLocks xmlns:a="http://schemas.openxmlformats.org/drawingml/2006/main" noGrp="1"/>
-          </p:cNvSpPr>
-          <p:nvPr/>
-        </p:nvSpPr>
-        <p:spPr>
-          <a:xfrm xmlns:a="http://schemas.openxmlformats.org/drawingml/2006/main">
-            <a:off x="1714500" y="4410075"/>
-            <a:ext cx="9429750" cy="609600"/>
+                <a16:creationId xmlns:a16="http://schemas.microsoft.com/office/drawing/2014/main" id="{23F2ECC4-F4DD-46E4-9869-5CF258E20C6B}"/>
+              </a:ext>
+            </a:extLst>
+          </p:cNvPr>
+          <p:cNvSpPr>
+            <a:spLocks xmlns:a="http://schemas.openxmlformats.org/drawingml/2006/main" noGrp="1"/>
+          </p:cNvSpPr>
+          <p:nvPr/>
+        </p:nvSpPr>
+        <p:spPr>
+          <a:xfrm xmlns:a="http://schemas.openxmlformats.org/drawingml/2006/main">
+            <a:off x="1714500" y="4743450"/>
+            <a:ext cx="9525000" cy="809625"/>
           </a:xfrm>
           <a:prstGeom xmlns:a="http://schemas.openxmlformats.org/drawingml/2006/main" prst="rect">
             <a:avLst/>
@@ -8815,7 +8823,7 @@
           <a:lstStyle xmlns:a="http://schemas.openxmlformats.org/drawingml/2006/main"/>
           <a:p xmlns:a="http://schemas.openxmlformats.org/drawingml/2006/main">
             <a:pPr algn="l">
-              <a:defRPr sz="1500" b="1">
+              <a:defRPr sz="1725" b="1">
                 <a:solidFill>
                   <a:srgbClr val="2F785D"/>
                 </a:solidFill>
@@ -8825,7 +8833,7 @@
               </a:defRPr>
             </a:pPr>
             <a:r>
-              <a:rPr sz="1500" b="1">
+              <a:rPr sz="1725" b="1">
                 <a:solidFill>
                   <a:srgbClr val="2F785D"/>
                 </a:solidFill>
@@ -8833,7 +8841,7 @@
                 <a:ea typeface="Arial"/>
                 <a:cs typeface="Arial"/>
               </a:rPr>
-              <a:t>Check the result: Simplify where needed and check the result for size and reasonableness.</a:t>
+              <a:t>Check subtraction: 515,381 + 386,759 = 902,140</a:t>
             </a:r>
           </a:p>
         </p:txBody>
@@ -8841,7 +8849,7 @@
     </p:spTree>
     <p:extLst>
       <p:ext uri="{BB962C8B-B14F-4D97-AF65-F5344CB8AC3E}">
-        <p14:creationId xmlns:p14="http://schemas.microsoft.com/office/powerpoint/2010/main" val="837602531"/>
+        <p14:creationId xmlns:p14="http://schemas.microsoft.com/office/powerpoint/2010/main" val="1142570872"/>
       </p:ext>
     </p:extLst>
   </p:cSld>
@@ -9134,7 +9142,7 @@
           <p:cNvPr id="15" name="">
             <a:extLst xmlns:a="http://schemas.openxmlformats.org/drawingml/2006/main">
               <a:ext uri="{FF2B5EF4-FFF2-40B4-BE49-F238E27FC236}">
-                <a16:creationId xmlns:a16="http://schemas.microsoft.com/office/drawing/2014/main" id="{F2BCE84F-BD3C-490D-A0C9-59DF2195D652}"/>
+                <a16:creationId xmlns:a16="http://schemas.microsoft.com/office/drawing/2014/main" id="{A7338DE6-2D33-4637-8EAB-DB9761397A00}"/>
               </a:ext>
             </a:extLst>
           </p:cNvPr>
@@ -9166,7 +9174,7 @@
           <p:cNvPr id="2" name="">
             <a:extLst xmlns:a="http://schemas.openxmlformats.org/drawingml/2006/main">
               <a:ext uri="{FF2B5EF4-FFF2-40B4-BE49-F238E27FC236}">
-                <a16:creationId xmlns:a16="http://schemas.microsoft.com/office/drawing/2014/main" id="{DC05FF05-7438-4483-88A9-E15958CCE694}"/>
+                <a16:creationId xmlns:a16="http://schemas.microsoft.com/office/drawing/2014/main" id="{F3BA7884-EAF5-4C44-8551-F82CE4835AEA}"/>
               </a:ext>
             </a:extLst>
           </p:cNvPr>
@@ -9223,7 +9231,7 @@
           <p:cNvPr id="3" name="">
             <a:extLst xmlns:a="http://schemas.openxmlformats.org/drawingml/2006/main">
               <a:ext uri="{FF2B5EF4-FFF2-40B4-BE49-F238E27FC236}">
-                <a16:creationId xmlns:a16="http://schemas.microsoft.com/office/drawing/2014/main" id="{AFD8AA4C-3428-457A-B5BA-53F91CF5C758}"/>
+                <a16:creationId xmlns:a16="http://schemas.microsoft.com/office/drawing/2014/main" id="{11D467A0-97F9-4777-A624-9EEB780ED269}"/>
               </a:ext>
             </a:extLst>
           </p:cNvPr>
@@ -9255,7 +9263,7 @@
           <p:cNvPr id="4" name="">
             <a:extLst xmlns:a="http://schemas.openxmlformats.org/drawingml/2006/main">
               <a:ext uri="{FF2B5EF4-FFF2-40B4-BE49-F238E27FC236}">
-                <a16:creationId xmlns:a16="http://schemas.microsoft.com/office/drawing/2014/main" id="{708146A8-9738-4876-9E9F-14839E75BFC4}"/>
+                <a16:creationId xmlns:a16="http://schemas.microsoft.com/office/drawing/2014/main" id="{BC75BFA7-169A-40E5-B2EE-979C1B1E879F}"/>
               </a:ext>
             </a:extLst>
           </p:cNvPr>
@@ -9312,7 +9320,7 @@
           <p:cNvPr id="5" name="">
             <a:extLst xmlns:a="http://schemas.openxmlformats.org/drawingml/2006/main">
               <a:ext uri="{FF2B5EF4-FFF2-40B4-BE49-F238E27FC236}">
-                <a16:creationId xmlns:a16="http://schemas.microsoft.com/office/drawing/2014/main" id="{31AE1CC3-C59A-46A2-9D6B-63D8125F638C}"/>
+                <a16:creationId xmlns:a16="http://schemas.microsoft.com/office/drawing/2014/main" id="{272898D0-B38B-4A4C-9030-171A6369D94D}"/>
               </a:ext>
             </a:extLst>
           </p:cNvPr>
@@ -9369,7 +9377,7 @@
           <p:cNvPr id="6" name="">
             <a:extLst xmlns:a="http://schemas.openxmlformats.org/drawingml/2006/main">
               <a:ext uri="{FF2B5EF4-FFF2-40B4-BE49-F238E27FC236}">
-                <a16:creationId xmlns:a16="http://schemas.microsoft.com/office/drawing/2014/main" id="{85221141-3C8C-47D3-B49F-92031C79C238}"/>
+                <a16:creationId xmlns:a16="http://schemas.microsoft.com/office/drawing/2014/main" id="{404DB45E-D7D6-42DD-9D3E-C75B61B8ECE0}"/>
               </a:ext>
             </a:extLst>
           </p:cNvPr>
@@ -9426,7 +9434,7 @@
           <p:cNvPr id="7" name="">
             <a:extLst xmlns:a="http://schemas.openxmlformats.org/drawingml/2006/main">
               <a:ext uri="{FF2B5EF4-FFF2-40B4-BE49-F238E27FC236}">
-                <a16:creationId xmlns:a16="http://schemas.microsoft.com/office/drawing/2014/main" id="{75E527BB-51B3-4D03-9B1B-EFB6F36AA4A0}"/>
+                <a16:creationId xmlns:a16="http://schemas.microsoft.com/office/drawing/2014/main" id="{6DC5C676-BFA2-4EF2-A6D8-087A23D9FC9D}"/>
               </a:ext>
             </a:extLst>
           </p:cNvPr>
@@ -9458,7 +9466,7 @@
           <p:cNvPr id="8" name="">
             <a:extLst xmlns:a="http://schemas.openxmlformats.org/drawingml/2006/main">
               <a:ext uri="{FF2B5EF4-FFF2-40B4-BE49-F238E27FC236}">
-                <a16:creationId xmlns:a16="http://schemas.microsoft.com/office/drawing/2014/main" id="{3916E956-BBE7-44D8-A76D-F900C5D7CFB4}"/>
+                <a16:creationId xmlns:a16="http://schemas.microsoft.com/office/drawing/2014/main" id="{4CFA867A-810C-4F7C-B66E-FCA9D16B1C00}"/>
               </a:ext>
             </a:extLst>
           </p:cNvPr>
@@ -9515,7 +9523,7 @@
           <p:cNvPr id="9" name="">
             <a:extLst xmlns:a="http://schemas.openxmlformats.org/drawingml/2006/main">
               <a:ext uri="{FF2B5EF4-FFF2-40B4-BE49-F238E27FC236}">
-                <a16:creationId xmlns:a16="http://schemas.microsoft.com/office/drawing/2014/main" id="{7E115B07-3240-478F-AF78-F804EA3FE011}"/>
+                <a16:creationId xmlns:a16="http://schemas.microsoft.com/office/drawing/2014/main" id="{665C041F-7149-4E81-9BB4-73B8C20914EE}"/>
               </a:ext>
             </a:extLst>
           </p:cNvPr>
@@ -9572,7 +9580,7 @@
           <p:cNvPr id="10" name="">
             <a:extLst xmlns:a="http://schemas.openxmlformats.org/drawingml/2006/main">
               <a:ext uri="{FF2B5EF4-FFF2-40B4-BE49-F238E27FC236}">
-                <a16:creationId xmlns:a16="http://schemas.microsoft.com/office/drawing/2014/main" id="{ED4CB93D-A012-4B9C-9461-7721E401161E}"/>
+                <a16:creationId xmlns:a16="http://schemas.microsoft.com/office/drawing/2014/main" id="{1EA9B48B-DC03-4E28-BF58-1F883A25449B}"/>
               </a:ext>
             </a:extLst>
           </p:cNvPr>
@@ -9629,7 +9637,7 @@
           <p:cNvPr id="11" name="">
             <a:extLst xmlns:a="http://schemas.openxmlformats.org/drawingml/2006/main">
               <a:ext uri="{FF2B5EF4-FFF2-40B4-BE49-F238E27FC236}">
-                <a16:creationId xmlns:a16="http://schemas.microsoft.com/office/drawing/2014/main" id="{E9772D45-D410-4BC0-80E6-B7A951015148}"/>
+                <a16:creationId xmlns:a16="http://schemas.microsoft.com/office/drawing/2014/main" id="{7CA76F87-026A-4A1C-900E-8B8DAE2F2456}"/>
               </a:ext>
             </a:extLst>
           </p:cNvPr>
@@ -9686,7 +9694,7 @@
           <p:cNvPr id="12" name="">
             <a:extLst xmlns:a="http://schemas.openxmlformats.org/drawingml/2006/main">
               <a:ext uri="{FF2B5EF4-FFF2-40B4-BE49-F238E27FC236}">
-                <a16:creationId xmlns:a16="http://schemas.microsoft.com/office/drawing/2014/main" id="{44CCF504-3413-4965-A8A5-09489AAFC678}"/>
+                <a16:creationId xmlns:a16="http://schemas.microsoft.com/office/drawing/2014/main" id="{0184A478-536F-4CE3-B24C-EA4615893AB0}"/>
               </a:ext>
             </a:extLst>
           </p:cNvPr>
@@ -9718,7 +9726,7 @@
           <p:cNvPr id="13" name="">
             <a:extLst xmlns:a="http://schemas.openxmlformats.org/drawingml/2006/main">
               <a:ext uri="{FF2B5EF4-FFF2-40B4-BE49-F238E27FC236}">
-                <a16:creationId xmlns:a16="http://schemas.microsoft.com/office/drawing/2014/main" id="{2CD0F8AD-724D-4387-9DA7-2F0B1921F100}"/>
+                <a16:creationId xmlns:a16="http://schemas.microsoft.com/office/drawing/2014/main" id="{459AFB86-EF12-4671-9852-3AEDA1CAD1AA}"/>
               </a:ext>
             </a:extLst>
           </p:cNvPr>
@@ -9775,7 +9783,7 @@
           <p:cNvPr id="14" name="">
             <a:extLst xmlns:a="http://schemas.openxmlformats.org/drawingml/2006/main">
               <a:ext uri="{FF2B5EF4-FFF2-40B4-BE49-F238E27FC236}">
-                <a16:creationId xmlns:a16="http://schemas.microsoft.com/office/drawing/2014/main" id="{72BE7080-7994-422C-A611-E373D8BE5F91}"/>
+                <a16:creationId xmlns:a16="http://schemas.microsoft.com/office/drawing/2014/main" id="{46C0EA43-098F-41E5-9F95-89991589EE2A}"/>
               </a:ext>
             </a:extLst>
           </p:cNvPr>
@@ -9830,7 +9838,7 @@
     </p:spTree>
     <p:extLst>
       <p:ext uri="{BB962C8B-B14F-4D97-AF65-F5344CB8AC3E}">
-        <p14:creationId xmlns:p14="http://schemas.microsoft.com/office/powerpoint/2010/main" val="1664530502"/>
+        <p14:creationId xmlns:p14="http://schemas.microsoft.com/office/powerpoint/2010/main" val="1011307794"/>
       </p:ext>
     </p:extLst>
   </p:cSld>
@@ -10031,7 +10039,7 @@
           <p:cNvPr id="16" name="">
             <a:extLst xmlns:a="http://schemas.openxmlformats.org/drawingml/2006/main">
               <a:ext uri="{FF2B5EF4-FFF2-40B4-BE49-F238E27FC236}">
-                <a16:creationId xmlns:a16="http://schemas.microsoft.com/office/drawing/2014/main" id="{65FF4FD2-EA50-4629-8BD1-893C98609C1E}"/>
+                <a16:creationId xmlns:a16="http://schemas.microsoft.com/office/drawing/2014/main" id="{45C6D4CE-682B-4D24-98CD-50349B8B7414}"/>
               </a:ext>
             </a:extLst>
           </p:cNvPr>
@@ -10063,7 +10071,7 @@
           <p:cNvPr id="2" name="">
             <a:extLst xmlns:a="http://schemas.openxmlformats.org/drawingml/2006/main">
               <a:ext uri="{FF2B5EF4-FFF2-40B4-BE49-F238E27FC236}">
-                <a16:creationId xmlns:a16="http://schemas.microsoft.com/office/drawing/2014/main" id="{2465D3C2-1256-447D-8182-5BBD61FB2796}"/>
+                <a16:creationId xmlns:a16="http://schemas.microsoft.com/office/drawing/2014/main" id="{E9DAC488-58AC-477F-9DE3-7EC87345DE78}"/>
               </a:ext>
             </a:extLst>
           </p:cNvPr>
@@ -10120,7 +10128,7 @@
           <p:cNvPr id="3" name="">
             <a:extLst xmlns:a="http://schemas.openxmlformats.org/drawingml/2006/main">
               <a:ext uri="{FF2B5EF4-FFF2-40B4-BE49-F238E27FC236}">
-                <a16:creationId xmlns:a16="http://schemas.microsoft.com/office/drawing/2014/main" id="{7AA33E18-0A25-4F88-A572-405458410250}"/>
+                <a16:creationId xmlns:a16="http://schemas.microsoft.com/office/drawing/2014/main" id="{B4186511-C071-468B-B70E-F174F639BD07}"/>
               </a:ext>
             </a:extLst>
           </p:cNvPr>
@@ -10152,7 +10160,7 @@
           <p:cNvPr id="4" name="">
             <a:extLst xmlns:a="http://schemas.openxmlformats.org/drawingml/2006/main">
               <a:ext uri="{FF2B5EF4-FFF2-40B4-BE49-F238E27FC236}">
-                <a16:creationId xmlns:a16="http://schemas.microsoft.com/office/drawing/2014/main" id="{86071F61-90AD-4C08-9141-BD80C6BA640B}"/>
+                <a16:creationId xmlns:a16="http://schemas.microsoft.com/office/drawing/2014/main" id="{7A7FB37A-F2F5-4DC9-900D-99B7D9C8BCEF}"/>
               </a:ext>
             </a:extLst>
           </p:cNvPr>
@@ -10209,7 +10217,7 @@
           <p:cNvPr id="5" name="">
             <a:extLst xmlns:a="http://schemas.openxmlformats.org/drawingml/2006/main">
               <a:ext uri="{FF2B5EF4-FFF2-40B4-BE49-F238E27FC236}">
-                <a16:creationId xmlns:a16="http://schemas.microsoft.com/office/drawing/2014/main" id="{79D7C5A4-8774-41D2-AF8D-51829FB73783}"/>
+                <a16:creationId xmlns:a16="http://schemas.microsoft.com/office/drawing/2014/main" id="{415C0496-E9D5-4F90-BD2E-E3E907D70F61}"/>
               </a:ext>
             </a:extLst>
           </p:cNvPr>
@@ -10266,7 +10274,7 @@
           <p:cNvPr id="6" name="">
             <a:extLst xmlns:a="http://schemas.openxmlformats.org/drawingml/2006/main">
               <a:ext uri="{FF2B5EF4-FFF2-40B4-BE49-F238E27FC236}">
-                <a16:creationId xmlns:a16="http://schemas.microsoft.com/office/drawing/2014/main" id="{C3768AA4-B4A7-4BEC-B258-7D246ED1833F}"/>
+                <a16:creationId xmlns:a16="http://schemas.microsoft.com/office/drawing/2014/main" id="{B207ECC5-BF55-4245-8EE4-906E85E627D3}"/>
               </a:ext>
             </a:extLst>
           </p:cNvPr>
@@ -10323,7 +10331,7 @@
           <p:cNvPr id="7" name="">
             <a:extLst xmlns:a="http://schemas.openxmlformats.org/drawingml/2006/main">
               <a:ext uri="{FF2B5EF4-FFF2-40B4-BE49-F238E27FC236}">
-                <a16:creationId xmlns:a16="http://schemas.microsoft.com/office/drawing/2014/main" id="{CD3B5FAB-8EED-4E94-AAD4-A48DFDBFCA9A}"/>
+                <a16:creationId xmlns:a16="http://schemas.microsoft.com/office/drawing/2014/main" id="{6A1DC0E4-A775-4EC5-93F4-844EDD66BC0E}"/>
               </a:ext>
             </a:extLst>
           </p:cNvPr>
@@ -10355,7 +10363,7 @@
           <p:cNvPr id="8" name="">
             <a:extLst xmlns:a="http://schemas.openxmlformats.org/drawingml/2006/main">
               <a:ext uri="{FF2B5EF4-FFF2-40B4-BE49-F238E27FC236}">
-                <a16:creationId xmlns:a16="http://schemas.microsoft.com/office/drawing/2014/main" id="{83E4A4BA-97D0-4F40-9A39-1162A557EF2D}"/>
+                <a16:creationId xmlns:a16="http://schemas.microsoft.com/office/drawing/2014/main" id="{D45527CA-C056-4A66-9CDE-88940E06302D}"/>
               </a:ext>
             </a:extLst>
           </p:cNvPr>
@@ -10412,7 +10420,7 @@
           <p:cNvPr id="9" name="">
             <a:extLst xmlns:a="http://schemas.openxmlformats.org/drawingml/2006/main">
               <a:ext uri="{FF2B5EF4-FFF2-40B4-BE49-F238E27FC236}">
-                <a16:creationId xmlns:a16="http://schemas.microsoft.com/office/drawing/2014/main" id="{30F06D9F-2FA3-4AA3-8341-2FDAE308C06A}"/>
+                <a16:creationId xmlns:a16="http://schemas.microsoft.com/office/drawing/2014/main" id="{855753FB-CCD7-4DAD-A603-A63D896B9A95}"/>
               </a:ext>
             </a:extLst>
           </p:cNvPr>
@@ -10469,7 +10477,7 @@
           <p:cNvPr id="10" name="">
             <a:extLst xmlns:a="http://schemas.openxmlformats.org/drawingml/2006/main">
               <a:ext uri="{FF2B5EF4-FFF2-40B4-BE49-F238E27FC236}">
-                <a16:creationId xmlns:a16="http://schemas.microsoft.com/office/drawing/2014/main" id="{AC5D3BE4-03A8-4E10-9F6D-74D0D331F34A}"/>
+                <a16:creationId xmlns:a16="http://schemas.microsoft.com/office/drawing/2014/main" id="{D85BBC6B-70FB-491E-B333-D9BACC69CA83}"/>
               </a:ext>
             </a:extLst>
           </p:cNvPr>
@@ -10526,7 +10534,7 @@
           <p:cNvPr id="11" name="">
             <a:extLst xmlns:a="http://schemas.openxmlformats.org/drawingml/2006/main">
               <a:ext uri="{FF2B5EF4-FFF2-40B4-BE49-F238E27FC236}">
-                <a16:creationId xmlns:a16="http://schemas.microsoft.com/office/drawing/2014/main" id="{B8C05020-7597-4CAD-908C-19B71FCC3FE9}"/>
+                <a16:creationId xmlns:a16="http://schemas.microsoft.com/office/drawing/2014/main" id="{32C53154-72FD-4A7F-9EE6-0844AD1846CE}"/>
               </a:ext>
             </a:extLst>
           </p:cNvPr>
@@ -10583,7 +10591,7 @@
           <p:cNvPr id="12" name="">
             <a:extLst xmlns:a="http://schemas.openxmlformats.org/drawingml/2006/main">
               <a:ext uri="{FF2B5EF4-FFF2-40B4-BE49-F238E27FC236}">
-                <a16:creationId xmlns:a16="http://schemas.microsoft.com/office/drawing/2014/main" id="{4180451E-AF1B-4312-893D-58AB87FE6CA1}"/>
+                <a16:creationId xmlns:a16="http://schemas.microsoft.com/office/drawing/2014/main" id="{39305074-EE52-4F21-8DB0-AB37F342B4DC}"/>
               </a:ext>
             </a:extLst>
           </p:cNvPr>
@@ -10640,7 +10648,7 @@
           <p:cNvPr id="13" name="">
             <a:extLst xmlns:a="http://schemas.openxmlformats.org/drawingml/2006/main">
               <a:ext uri="{FF2B5EF4-FFF2-40B4-BE49-F238E27FC236}">
-                <a16:creationId xmlns:a16="http://schemas.microsoft.com/office/drawing/2014/main" id="{CEB51D10-132C-45DC-95E1-18697DEF8AD3}"/>
+                <a16:creationId xmlns:a16="http://schemas.microsoft.com/office/drawing/2014/main" id="{7852706F-78A0-4608-9978-AFF74E4209AD}"/>
               </a:ext>
             </a:extLst>
           </p:cNvPr>
@@ -10697,7 +10705,7 @@
           <p:cNvPr id="14" name="">
             <a:extLst xmlns:a="http://schemas.openxmlformats.org/drawingml/2006/main">
               <a:ext uri="{FF2B5EF4-FFF2-40B4-BE49-F238E27FC236}">
-                <a16:creationId xmlns:a16="http://schemas.microsoft.com/office/drawing/2014/main" id="{427B6CA5-5570-4FCC-863E-947AEDC1825C}"/>
+                <a16:creationId xmlns:a16="http://schemas.microsoft.com/office/drawing/2014/main" id="{D350F995-B6F1-47BB-887E-3C44528E466C}"/>
               </a:ext>
             </a:extLst>
           </p:cNvPr>
@@ -10754,7 +10762,7 @@
           <p:cNvPr id="15" name="">
             <a:extLst xmlns:a="http://schemas.openxmlformats.org/drawingml/2006/main">
               <a:ext uri="{FF2B5EF4-FFF2-40B4-BE49-F238E27FC236}">
-                <a16:creationId xmlns:a16="http://schemas.microsoft.com/office/drawing/2014/main" id="{8D9C3CD0-68F5-4EA3-B724-55C0C868984C}"/>
+                <a16:creationId xmlns:a16="http://schemas.microsoft.com/office/drawing/2014/main" id="{EF75130F-AD39-4F94-B292-490C06C10C97}"/>
               </a:ext>
             </a:extLst>
           </p:cNvPr>
@@ -10809,7 +10817,7 @@
     </p:spTree>
     <p:extLst>
       <p:ext uri="{BB962C8B-B14F-4D97-AF65-F5344CB8AC3E}">
-        <p14:creationId xmlns:p14="http://schemas.microsoft.com/office/powerpoint/2010/main" val="44886688"/>
+        <p14:creationId xmlns:p14="http://schemas.microsoft.com/office/powerpoint/2010/main" val="621742778"/>
       </p:ext>
     </p:extLst>
   </p:cSld>
@@ -10964,7 +10972,7 @@
           <p:cNvPr id="16" name="">
             <a:extLst xmlns:a="http://schemas.openxmlformats.org/drawingml/2006/main">
               <a:ext uri="{FF2B5EF4-FFF2-40B4-BE49-F238E27FC236}">
-                <a16:creationId xmlns:a16="http://schemas.microsoft.com/office/drawing/2014/main" id="{96FA8EB8-F76C-415E-B250-A77D7D687CAD}"/>
+                <a16:creationId xmlns:a16="http://schemas.microsoft.com/office/drawing/2014/main" id="{D00B0812-17B4-4C12-9C1A-DCBA293472E7}"/>
               </a:ext>
             </a:extLst>
           </p:cNvPr>
@@ -10996,7 +11004,7 @@
           <p:cNvPr id="2" name="">
             <a:extLst xmlns:a="http://schemas.openxmlformats.org/drawingml/2006/main">
               <a:ext uri="{FF2B5EF4-FFF2-40B4-BE49-F238E27FC236}">
-                <a16:creationId xmlns:a16="http://schemas.microsoft.com/office/drawing/2014/main" id="{CD28644A-D020-4D4B-B669-1371BC94482F}"/>
+                <a16:creationId xmlns:a16="http://schemas.microsoft.com/office/drawing/2014/main" id="{45D573A2-C31C-4ACF-A269-CBF23B64D923}"/>
               </a:ext>
             </a:extLst>
           </p:cNvPr>
@@ -11053,7 +11061,7 @@
           <p:cNvPr id="3" name="">
             <a:extLst xmlns:a="http://schemas.openxmlformats.org/drawingml/2006/main">
               <a:ext uri="{FF2B5EF4-FFF2-40B4-BE49-F238E27FC236}">
-                <a16:creationId xmlns:a16="http://schemas.microsoft.com/office/drawing/2014/main" id="{A7E3D4C9-4D58-4EB6-8EE1-4E7C29F4012B}"/>
+                <a16:creationId xmlns:a16="http://schemas.microsoft.com/office/drawing/2014/main" id="{5A8DC724-DC1A-42B1-A1EB-849383D679C3}"/>
               </a:ext>
             </a:extLst>
           </p:cNvPr>
@@ -11085,7 +11093,7 @@
           <p:cNvPr id="4" name="">
             <a:extLst xmlns:a="http://schemas.openxmlformats.org/drawingml/2006/main">
               <a:ext uri="{FF2B5EF4-FFF2-40B4-BE49-F238E27FC236}">
-                <a16:creationId xmlns:a16="http://schemas.microsoft.com/office/drawing/2014/main" id="{0997565F-2391-4E29-8355-9B4DE77CA278}"/>
+                <a16:creationId xmlns:a16="http://schemas.microsoft.com/office/drawing/2014/main" id="{14388717-9816-41D3-A8F4-BE7054FD33DB}"/>
               </a:ext>
             </a:extLst>
           </p:cNvPr>
@@ -11142,7 +11150,7 @@
           <p:cNvPr id="5" name="">
             <a:extLst xmlns:a="http://schemas.openxmlformats.org/drawingml/2006/main">
               <a:ext uri="{FF2B5EF4-FFF2-40B4-BE49-F238E27FC236}">
-                <a16:creationId xmlns:a16="http://schemas.microsoft.com/office/drawing/2014/main" id="{D12CA443-BAB8-4858-8DBB-244E9DDD1858}"/>
+                <a16:creationId xmlns:a16="http://schemas.microsoft.com/office/drawing/2014/main" id="{DCB3F850-FD24-4036-8D0F-FAEA08E047D2}"/>
               </a:ext>
             </a:extLst>
           </p:cNvPr>
@@ -11199,7 +11207,7 @@
           <p:cNvPr id="6" name="">
             <a:extLst xmlns:a="http://schemas.openxmlformats.org/drawingml/2006/main">
               <a:ext uri="{FF2B5EF4-FFF2-40B4-BE49-F238E27FC236}">
-                <a16:creationId xmlns:a16="http://schemas.microsoft.com/office/drawing/2014/main" id="{21F52CE3-F2F0-417B-92E7-55195EED24E1}"/>
+                <a16:creationId xmlns:a16="http://schemas.microsoft.com/office/drawing/2014/main" id="{6127E1BF-6D4F-4785-9DAD-0269C088F325}"/>
               </a:ext>
             </a:extLst>
           </p:cNvPr>
@@ -11256,7 +11264,7 @@
           <p:cNvPr id="7" name="">
             <a:extLst xmlns:a="http://schemas.openxmlformats.org/drawingml/2006/main">
               <a:ext uri="{FF2B5EF4-FFF2-40B4-BE49-F238E27FC236}">
-                <a16:creationId xmlns:a16="http://schemas.microsoft.com/office/drawing/2014/main" id="{92EF3AE3-0271-4D24-9CB5-A8473E7E48AA}"/>
+                <a16:creationId xmlns:a16="http://schemas.microsoft.com/office/drawing/2014/main" id="{A057F450-67B7-416B-822E-3F5B21698C65}"/>
               </a:ext>
             </a:extLst>
           </p:cNvPr>
@@ -11288,7 +11296,7 @@
           <p:cNvPr id="8" name="">
             <a:extLst xmlns:a="http://schemas.openxmlformats.org/drawingml/2006/main">
               <a:ext uri="{FF2B5EF4-FFF2-40B4-BE49-F238E27FC236}">
-                <a16:creationId xmlns:a16="http://schemas.microsoft.com/office/drawing/2014/main" id="{F6300D54-AA3B-4948-8C1C-45912397430E}"/>
+                <a16:creationId xmlns:a16="http://schemas.microsoft.com/office/drawing/2014/main" id="{9D2E2664-FDCD-490E-8356-FD0A8FB6B843}"/>
               </a:ext>
             </a:extLst>
           </p:cNvPr>
@@ -11345,7 +11353,7 @@
           <p:cNvPr id="9" name="">
             <a:extLst xmlns:a="http://schemas.openxmlformats.org/drawingml/2006/main">
               <a:ext uri="{FF2B5EF4-FFF2-40B4-BE49-F238E27FC236}">
-                <a16:creationId xmlns:a16="http://schemas.microsoft.com/office/drawing/2014/main" id="{1CAC7D3B-3AF7-4F83-AF4F-58B6E0E397BD}"/>
+                <a16:creationId xmlns:a16="http://schemas.microsoft.com/office/drawing/2014/main" id="{32004CD8-39CE-4C2D-A765-18B4B007295A}"/>
               </a:ext>
             </a:extLst>
           </p:cNvPr>
@@ -11406,7 +11414,7 @@
           <p:nvPr/>
         </p:nvPicPr>
         <p:blipFill>
-          <a:blip xmlns:r="http://schemas.openxmlformats.org/officeDocument/2006/relationships" xmlns:a="http://schemas.openxmlformats.org/drawingml/2006/main" r:embed="Ra89c32945ed6406d"/>
+          <a:blip xmlns:r="http://schemas.openxmlformats.org/officeDocument/2006/relationships" xmlns:a="http://schemas.openxmlformats.org/drawingml/2006/main" r:embed="Rc5fd60a753ad4e0c"/>
           <a:stretch xmlns:a="http://schemas.openxmlformats.org/drawingml/2006/main"/>
         </p:blipFill>
         <p:spPr>
@@ -11424,7 +11432,7 @@
           <p:cNvPr id="11" name="">
             <a:extLst xmlns:a="http://schemas.openxmlformats.org/drawingml/2006/main">
               <a:ext uri="{FF2B5EF4-FFF2-40B4-BE49-F238E27FC236}">
-                <a16:creationId xmlns:a16="http://schemas.microsoft.com/office/drawing/2014/main" id="{6B421DB9-552E-4FC0-A210-AB2748DF66E8}"/>
+                <a16:creationId xmlns:a16="http://schemas.microsoft.com/office/drawing/2014/main" id="{24847DB2-520F-4383-96EB-F26F59F9CC90}"/>
               </a:ext>
             </a:extLst>
           </p:cNvPr>
@@ -11481,7 +11489,7 @@
           <p:cNvPr id="12" name="">
             <a:extLst xmlns:a="http://schemas.openxmlformats.org/drawingml/2006/main">
               <a:ext uri="{FF2B5EF4-FFF2-40B4-BE49-F238E27FC236}">
-                <a16:creationId xmlns:a16="http://schemas.microsoft.com/office/drawing/2014/main" id="{9DAF0102-2476-4761-95D3-7C6CB82D2ED1}"/>
+                <a16:creationId xmlns:a16="http://schemas.microsoft.com/office/drawing/2014/main" id="{094E747D-0F9C-43B0-958E-40377878F61E}"/>
               </a:ext>
             </a:extLst>
           </p:cNvPr>
@@ -11538,7 +11546,7 @@
           <p:cNvPr id="13" name="">
             <a:extLst xmlns:a="http://schemas.openxmlformats.org/drawingml/2006/main">
               <a:ext uri="{FF2B5EF4-FFF2-40B4-BE49-F238E27FC236}">
-                <a16:creationId xmlns:a16="http://schemas.microsoft.com/office/drawing/2014/main" id="{3B7E9C44-28B4-456F-837C-3BAB283E0EA2}"/>
+                <a16:creationId xmlns:a16="http://schemas.microsoft.com/office/drawing/2014/main" id="{ADCF7FEC-6244-4756-B753-60D562E644F0}"/>
               </a:ext>
             </a:extLst>
           </p:cNvPr>
@@ -11570,7 +11578,7 @@
           <p:cNvPr id="14" name="">
             <a:extLst xmlns:a="http://schemas.openxmlformats.org/drawingml/2006/main">
               <a:ext uri="{FF2B5EF4-FFF2-40B4-BE49-F238E27FC236}">
-                <a16:creationId xmlns:a16="http://schemas.microsoft.com/office/drawing/2014/main" id="{D001FDEE-61D1-4461-AE74-2AAEE44C237E}"/>
+                <a16:creationId xmlns:a16="http://schemas.microsoft.com/office/drawing/2014/main" id="{F0D2B2F4-226F-4E40-B825-4B5B39CF9262}"/>
               </a:ext>
             </a:extLst>
           </p:cNvPr>
@@ -11627,7 +11635,7 @@
           <p:cNvPr id="15" name="">
             <a:extLst xmlns:a="http://schemas.openxmlformats.org/drawingml/2006/main">
               <a:ext uri="{FF2B5EF4-FFF2-40B4-BE49-F238E27FC236}">
-                <a16:creationId xmlns:a16="http://schemas.microsoft.com/office/drawing/2014/main" id="{B9457AF9-9A69-48B7-9648-6525CA3E9D72}"/>
+                <a16:creationId xmlns:a16="http://schemas.microsoft.com/office/drawing/2014/main" id="{59A1C19D-6989-490F-BA04-12F706CA5197}"/>
               </a:ext>
             </a:extLst>
           </p:cNvPr>
@@ -11682,7 +11690,7 @@
     </p:spTree>
     <p:extLst>
       <p:ext uri="{BB962C8B-B14F-4D97-AF65-F5344CB8AC3E}">
-        <p14:creationId xmlns:p14="http://schemas.microsoft.com/office/powerpoint/2010/main" val="1694340362"/>
+        <p14:creationId xmlns:p14="http://schemas.microsoft.com/office/powerpoint/2010/main" val="1325724075"/>
       </p:ext>
     </p:extLst>
   </p:cSld>
@@ -11837,7 +11845,7 @@
           <p:cNvPr id="23" name="">
             <a:extLst xmlns:a="http://schemas.openxmlformats.org/drawingml/2006/main">
               <a:ext uri="{FF2B5EF4-FFF2-40B4-BE49-F238E27FC236}">
-                <a16:creationId xmlns:a16="http://schemas.microsoft.com/office/drawing/2014/main" id="{8DE47FDC-2CBA-428E-B14C-295EF1B194BB}"/>
+                <a16:creationId xmlns:a16="http://schemas.microsoft.com/office/drawing/2014/main" id="{B82C89BC-B42D-4DFC-92DA-9D301B13C141}"/>
               </a:ext>
             </a:extLst>
           </p:cNvPr>
@@ -11869,7 +11877,7 @@
           <p:cNvPr id="2" name="">
             <a:extLst xmlns:a="http://schemas.openxmlformats.org/drawingml/2006/main">
               <a:ext uri="{FF2B5EF4-FFF2-40B4-BE49-F238E27FC236}">
-                <a16:creationId xmlns:a16="http://schemas.microsoft.com/office/drawing/2014/main" id="{D8AE2881-B740-4270-8855-F3D8BE0F99F2}"/>
+                <a16:creationId xmlns:a16="http://schemas.microsoft.com/office/drawing/2014/main" id="{E8A5FB43-DD31-4AEB-B60B-8AB4B37222BD}"/>
               </a:ext>
             </a:extLst>
           </p:cNvPr>
@@ -11926,7 +11934,7 @@
           <p:cNvPr id="3" name="">
             <a:extLst xmlns:a="http://schemas.openxmlformats.org/drawingml/2006/main">
               <a:ext uri="{FF2B5EF4-FFF2-40B4-BE49-F238E27FC236}">
-                <a16:creationId xmlns:a16="http://schemas.microsoft.com/office/drawing/2014/main" id="{DCF3AB66-52A1-445E-8E3F-5B94B03F3066}"/>
+                <a16:creationId xmlns:a16="http://schemas.microsoft.com/office/drawing/2014/main" id="{99723A36-4E7B-418C-828B-2E2A28E8AA56}"/>
               </a:ext>
             </a:extLst>
           </p:cNvPr>
@@ -11958,7 +11966,7 @@
           <p:cNvPr id="4" name="">
             <a:extLst xmlns:a="http://schemas.openxmlformats.org/drawingml/2006/main">
               <a:ext uri="{FF2B5EF4-FFF2-40B4-BE49-F238E27FC236}">
-                <a16:creationId xmlns:a16="http://schemas.microsoft.com/office/drawing/2014/main" id="{29509B36-3622-48CF-A4E1-0A0DDD99F253}"/>
+                <a16:creationId xmlns:a16="http://schemas.microsoft.com/office/drawing/2014/main" id="{0638AE1C-C7E3-4377-A575-0EC443A7F584}"/>
               </a:ext>
             </a:extLst>
           </p:cNvPr>
@@ -12015,7 +12023,7 @@
           <p:cNvPr id="5" name="">
             <a:extLst xmlns:a="http://schemas.openxmlformats.org/drawingml/2006/main">
               <a:ext uri="{FF2B5EF4-FFF2-40B4-BE49-F238E27FC236}">
-                <a16:creationId xmlns:a16="http://schemas.microsoft.com/office/drawing/2014/main" id="{AF28692A-D84B-468F-B6B4-E791E4ECE160}"/>
+                <a16:creationId xmlns:a16="http://schemas.microsoft.com/office/drawing/2014/main" id="{AB66992F-1F4F-4313-B5A6-24DC7E56E4E8}"/>
               </a:ext>
             </a:extLst>
           </p:cNvPr>
@@ -12072,7 +12080,7 @@
           <p:cNvPr id="6" name="">
             <a:extLst xmlns:a="http://schemas.openxmlformats.org/drawingml/2006/main">
               <a:ext uri="{FF2B5EF4-FFF2-40B4-BE49-F238E27FC236}">
-                <a16:creationId xmlns:a16="http://schemas.microsoft.com/office/drawing/2014/main" id="{808914E6-8C53-421D-8BA9-7AB937D6E523}"/>
+                <a16:creationId xmlns:a16="http://schemas.microsoft.com/office/drawing/2014/main" id="{6EB54671-BA7F-4873-A252-83969CCD04E9}"/>
               </a:ext>
             </a:extLst>
           </p:cNvPr>
@@ -12129,7 +12137,7 @@
           <p:cNvPr id="7" name="">
             <a:extLst xmlns:a="http://schemas.openxmlformats.org/drawingml/2006/main">
               <a:ext uri="{FF2B5EF4-FFF2-40B4-BE49-F238E27FC236}">
-                <a16:creationId xmlns:a16="http://schemas.microsoft.com/office/drawing/2014/main" id="{1F1D0CFE-C22D-481B-908F-EA2190297368}"/>
+                <a16:creationId xmlns:a16="http://schemas.microsoft.com/office/drawing/2014/main" id="{699C51FC-FFA4-49A4-9D20-3AA9BE187908}"/>
               </a:ext>
             </a:extLst>
           </p:cNvPr>
@@ -12161,7 +12169,7 @@
           <p:cNvPr id="8" name="">
             <a:extLst xmlns:a="http://schemas.openxmlformats.org/drawingml/2006/main">
               <a:ext uri="{FF2B5EF4-FFF2-40B4-BE49-F238E27FC236}">
-                <a16:creationId xmlns:a16="http://schemas.microsoft.com/office/drawing/2014/main" id="{B05AA5A6-0329-41FC-A95E-310A13FF0A74}"/>
+                <a16:creationId xmlns:a16="http://schemas.microsoft.com/office/drawing/2014/main" id="{A69CB5FC-D2CE-4308-BD5B-847840DCD9F5}"/>
               </a:ext>
             </a:extLst>
           </p:cNvPr>
@@ -12218,7 +12226,7 @@
           <p:cNvPr id="9" name="">
             <a:extLst xmlns:a="http://schemas.openxmlformats.org/drawingml/2006/main">
               <a:ext uri="{FF2B5EF4-FFF2-40B4-BE49-F238E27FC236}">
-                <a16:creationId xmlns:a16="http://schemas.microsoft.com/office/drawing/2014/main" id="{D9A92B92-CED2-4CA0-8E52-F18AE5526D03}"/>
+                <a16:creationId xmlns:a16="http://schemas.microsoft.com/office/drawing/2014/main" id="{2564D624-D05B-463F-A3C6-5A84836A9273}"/>
               </a:ext>
             </a:extLst>
           </p:cNvPr>
@@ -12275,7 +12283,7 @@
           <p:cNvPr id="10" name="">
             <a:extLst xmlns:a="http://schemas.openxmlformats.org/drawingml/2006/main">
               <a:ext uri="{FF2B5EF4-FFF2-40B4-BE49-F238E27FC236}">
-                <a16:creationId xmlns:a16="http://schemas.microsoft.com/office/drawing/2014/main" id="{DF2506FC-C4B2-42C7-AC17-F91EAEF4660E}"/>
+                <a16:creationId xmlns:a16="http://schemas.microsoft.com/office/drawing/2014/main" id="{9196D115-16D5-413E-AF50-C819073F47C9}"/>
               </a:ext>
             </a:extLst>
           </p:cNvPr>
@@ -12309,7 +12317,7 @@
           <p:cNvPr id="11" name="">
             <a:extLst xmlns:a="http://schemas.openxmlformats.org/drawingml/2006/main">
               <a:ext uri="{FF2B5EF4-FFF2-40B4-BE49-F238E27FC236}">
-                <a16:creationId xmlns:a16="http://schemas.microsoft.com/office/drawing/2014/main" id="{2486A415-7755-4D1E-ADA6-130AEC912C85}"/>
+                <a16:creationId xmlns:a16="http://schemas.microsoft.com/office/drawing/2014/main" id="{F5AE5CD1-0C86-43D5-B274-5834AE59CF9F}"/>
               </a:ext>
             </a:extLst>
           </p:cNvPr>
@@ -12341,7 +12349,7 @@
           <p:cNvPr id="12" name="">
             <a:extLst xmlns:a="http://schemas.openxmlformats.org/drawingml/2006/main">
               <a:ext uri="{FF2B5EF4-FFF2-40B4-BE49-F238E27FC236}">
-                <a16:creationId xmlns:a16="http://schemas.microsoft.com/office/drawing/2014/main" id="{A961E483-719B-455F-B5EB-E1FA6A690C85}"/>
+                <a16:creationId xmlns:a16="http://schemas.microsoft.com/office/drawing/2014/main" id="{0817793E-E077-433B-A464-85F21324C829}"/>
               </a:ext>
             </a:extLst>
           </p:cNvPr>
@@ -12398,7 +12406,7 @@
           <p:cNvPr id="13" name="">
             <a:extLst xmlns:a="http://schemas.openxmlformats.org/drawingml/2006/main">
               <a:ext uri="{FF2B5EF4-FFF2-40B4-BE49-F238E27FC236}">
-                <a16:creationId xmlns:a16="http://schemas.microsoft.com/office/drawing/2014/main" id="{22D9426F-F92A-4CC3-9898-B25866952280}"/>
+                <a16:creationId xmlns:a16="http://schemas.microsoft.com/office/drawing/2014/main" id="{662A10D2-55C3-4A6E-A679-F98404667CE9}"/>
               </a:ext>
             </a:extLst>
           </p:cNvPr>
@@ -12455,7 +12463,7 @@
           <p:cNvPr id="14" name="">
             <a:extLst xmlns:a="http://schemas.openxmlformats.org/drawingml/2006/main">
               <a:ext uri="{FF2B5EF4-FFF2-40B4-BE49-F238E27FC236}">
-                <a16:creationId xmlns:a16="http://schemas.microsoft.com/office/drawing/2014/main" id="{45122817-62F5-4CE7-A8A0-2BE66D98AA1B}"/>
+                <a16:creationId xmlns:a16="http://schemas.microsoft.com/office/drawing/2014/main" id="{ED2C5A6C-3B97-44EE-9A03-CE34EA389A99}"/>
               </a:ext>
             </a:extLst>
           </p:cNvPr>
@@ -12489,7 +12497,7 @@
           <p:cNvPr id="15" name="">
             <a:extLst xmlns:a="http://schemas.openxmlformats.org/drawingml/2006/main">
               <a:ext uri="{FF2B5EF4-FFF2-40B4-BE49-F238E27FC236}">
-                <a16:creationId xmlns:a16="http://schemas.microsoft.com/office/drawing/2014/main" id="{571F47E0-E6BF-4E42-8E08-43556F4C9018}"/>
+                <a16:creationId xmlns:a16="http://schemas.microsoft.com/office/drawing/2014/main" id="{C50A35C6-5F9C-4A74-8355-494E0C1689CA}"/>
               </a:ext>
             </a:extLst>
           </p:cNvPr>
@@ -12521,7 +12529,7 @@
           <p:cNvPr id="16" name="">
             <a:extLst xmlns:a="http://schemas.openxmlformats.org/drawingml/2006/main">
               <a:ext uri="{FF2B5EF4-FFF2-40B4-BE49-F238E27FC236}">
-                <a16:creationId xmlns:a16="http://schemas.microsoft.com/office/drawing/2014/main" id="{180F9C98-D2CE-4F4E-806A-28B8C37B69BE}"/>
+                <a16:creationId xmlns:a16="http://schemas.microsoft.com/office/drawing/2014/main" id="{0C9F6D72-4AAF-4FAF-8DAD-F831D58B3732}"/>
               </a:ext>
             </a:extLst>
           </p:cNvPr>
@@ -12578,7 +12586,7 @@
           <p:cNvPr id="17" name="">
             <a:extLst xmlns:a="http://schemas.openxmlformats.org/drawingml/2006/main">
               <a:ext uri="{FF2B5EF4-FFF2-40B4-BE49-F238E27FC236}">
-                <a16:creationId xmlns:a16="http://schemas.microsoft.com/office/drawing/2014/main" id="{9B102BDE-844A-4113-906A-B8123F8363EB}"/>
+                <a16:creationId xmlns:a16="http://schemas.microsoft.com/office/drawing/2014/main" id="{56C150D8-D232-4E32-8776-0C050C9AAA46}"/>
               </a:ext>
             </a:extLst>
           </p:cNvPr>
@@ -12635,7 +12643,7 @@
           <p:cNvPr id="18" name="">
             <a:extLst xmlns:a="http://schemas.openxmlformats.org/drawingml/2006/main">
               <a:ext uri="{FF2B5EF4-FFF2-40B4-BE49-F238E27FC236}">
-                <a16:creationId xmlns:a16="http://schemas.microsoft.com/office/drawing/2014/main" id="{7E6B5105-5452-4DC3-AD57-818EB8DBC5E4}"/>
+                <a16:creationId xmlns:a16="http://schemas.microsoft.com/office/drawing/2014/main" id="{B0571217-4DAA-472F-9BB2-C4140355270B}"/>
               </a:ext>
             </a:extLst>
           </p:cNvPr>
@@ -12669,7 +12677,7 @@
           <p:cNvPr id="19" name="">
             <a:extLst xmlns:a="http://schemas.openxmlformats.org/drawingml/2006/main">
               <a:ext uri="{FF2B5EF4-FFF2-40B4-BE49-F238E27FC236}">
-                <a16:creationId xmlns:a16="http://schemas.microsoft.com/office/drawing/2014/main" id="{63119E2C-70C4-4D66-964C-5297A485C809}"/>
+                <a16:creationId xmlns:a16="http://schemas.microsoft.com/office/drawing/2014/main" id="{9E22ED0F-6E2D-471D-B22A-13DCECCC03DA}"/>
               </a:ext>
             </a:extLst>
           </p:cNvPr>
@@ -12701,7 +12709,7 @@
           <p:cNvPr id="20" name="">
             <a:extLst xmlns:a="http://schemas.openxmlformats.org/drawingml/2006/main">
               <a:ext uri="{FF2B5EF4-FFF2-40B4-BE49-F238E27FC236}">
-                <a16:creationId xmlns:a16="http://schemas.microsoft.com/office/drawing/2014/main" id="{A7AB92D0-634B-4EC5-8B1D-96FF7B8C4131}"/>
+                <a16:creationId xmlns:a16="http://schemas.microsoft.com/office/drawing/2014/main" id="{15D0A9C3-2320-468D-81FD-33A5A2EA68F7}"/>
               </a:ext>
             </a:extLst>
           </p:cNvPr>
@@ -12758,7 +12766,7 @@
           <p:cNvPr id="21" name="">
             <a:extLst xmlns:a="http://schemas.openxmlformats.org/drawingml/2006/main">
               <a:ext uri="{FF2B5EF4-FFF2-40B4-BE49-F238E27FC236}">
-                <a16:creationId xmlns:a16="http://schemas.microsoft.com/office/drawing/2014/main" id="{B8FCFEF2-1475-4410-A572-23E2804063C7}"/>
+                <a16:creationId xmlns:a16="http://schemas.microsoft.com/office/drawing/2014/main" id="{E8C65488-CAE2-4764-AD65-D0478184C4C1}"/>
               </a:ext>
             </a:extLst>
           </p:cNvPr>
@@ -12815,7 +12823,7 @@
           <p:cNvPr id="22" name="">
             <a:extLst xmlns:a="http://schemas.openxmlformats.org/drawingml/2006/main">
               <a:ext uri="{FF2B5EF4-FFF2-40B4-BE49-F238E27FC236}">
-                <a16:creationId xmlns:a16="http://schemas.microsoft.com/office/drawing/2014/main" id="{3A0D125E-2A7C-45D4-A7C5-2389C7FD8E2E}"/>
+                <a16:creationId xmlns:a16="http://schemas.microsoft.com/office/drawing/2014/main" id="{7E3BE53F-7C67-4D32-8B6E-D1E637150C11}"/>
               </a:ext>
             </a:extLst>
           </p:cNvPr>
@@ -12870,7 +12878,7 @@
     </p:spTree>
     <p:extLst>
       <p:ext uri="{BB962C8B-B14F-4D97-AF65-F5344CB8AC3E}">
-        <p14:creationId xmlns:p14="http://schemas.microsoft.com/office/powerpoint/2010/main" val="618543236"/>
+        <p14:creationId xmlns:p14="http://schemas.microsoft.com/office/powerpoint/2010/main" val="1595592297"/>
       </p:ext>
     </p:extLst>
   </p:cSld>
@@ -13071,7 +13079,7 @@
           <p:cNvPr id="22" name="">
             <a:extLst xmlns:a="http://schemas.openxmlformats.org/drawingml/2006/main">
               <a:ext uri="{FF2B5EF4-FFF2-40B4-BE49-F238E27FC236}">
-                <a16:creationId xmlns:a16="http://schemas.microsoft.com/office/drawing/2014/main" id="{9B59E344-2D99-4DF7-8481-88855C25AEEA}"/>
+                <a16:creationId xmlns:a16="http://schemas.microsoft.com/office/drawing/2014/main" id="{4F6A908A-FAFA-45A2-8CAC-570102ED4C3E}"/>
               </a:ext>
             </a:extLst>
           </p:cNvPr>
@@ -13103,7 +13111,7 @@
           <p:cNvPr id="2" name="">
             <a:extLst xmlns:a="http://schemas.openxmlformats.org/drawingml/2006/main">
               <a:ext uri="{FF2B5EF4-FFF2-40B4-BE49-F238E27FC236}">
-                <a16:creationId xmlns:a16="http://schemas.microsoft.com/office/drawing/2014/main" id="{87BFE048-AC2B-432B-8FC9-34BA800B99BB}"/>
+                <a16:creationId xmlns:a16="http://schemas.microsoft.com/office/drawing/2014/main" id="{BA7F568F-72E8-4D2E-8197-F96843D32C48}"/>
               </a:ext>
             </a:extLst>
           </p:cNvPr>
@@ -13160,7 +13168,7 @@
           <p:cNvPr id="3" name="">
             <a:extLst xmlns:a="http://schemas.openxmlformats.org/drawingml/2006/main">
               <a:ext uri="{FF2B5EF4-FFF2-40B4-BE49-F238E27FC236}">
-                <a16:creationId xmlns:a16="http://schemas.microsoft.com/office/drawing/2014/main" id="{04DA22EE-266E-4C37-A0E0-E1975C45DBF8}"/>
+                <a16:creationId xmlns:a16="http://schemas.microsoft.com/office/drawing/2014/main" id="{7CCECF7B-D5C1-4415-A1A9-B85D13375E12}"/>
               </a:ext>
             </a:extLst>
           </p:cNvPr>
@@ -13192,7 +13200,7 @@
           <p:cNvPr id="4" name="">
             <a:extLst xmlns:a="http://schemas.openxmlformats.org/drawingml/2006/main">
               <a:ext uri="{FF2B5EF4-FFF2-40B4-BE49-F238E27FC236}">
-                <a16:creationId xmlns:a16="http://schemas.microsoft.com/office/drawing/2014/main" id="{8E06F057-7131-4115-9C95-CD652D2747DB}"/>
+                <a16:creationId xmlns:a16="http://schemas.microsoft.com/office/drawing/2014/main" id="{48EDB012-6BCD-4AFB-A279-A6CBD8E108B6}"/>
               </a:ext>
             </a:extLst>
           </p:cNvPr>
@@ -13249,7 +13257,7 @@
           <p:cNvPr id="5" name="">
             <a:extLst xmlns:a="http://schemas.openxmlformats.org/drawingml/2006/main">
               <a:ext uri="{FF2B5EF4-FFF2-40B4-BE49-F238E27FC236}">
-                <a16:creationId xmlns:a16="http://schemas.microsoft.com/office/drawing/2014/main" id="{CCF79C55-142A-4068-9288-52A0534814AD}"/>
+                <a16:creationId xmlns:a16="http://schemas.microsoft.com/office/drawing/2014/main" id="{6FC01D6B-332E-4DE9-86AD-46180127B6B5}"/>
               </a:ext>
             </a:extLst>
           </p:cNvPr>
@@ -13306,7 +13314,7 @@
           <p:cNvPr id="6" name="">
             <a:extLst xmlns:a="http://schemas.openxmlformats.org/drawingml/2006/main">
               <a:ext uri="{FF2B5EF4-FFF2-40B4-BE49-F238E27FC236}">
-                <a16:creationId xmlns:a16="http://schemas.microsoft.com/office/drawing/2014/main" id="{DE7AE5F6-A162-413E-A970-E618F5AFA62D}"/>
+                <a16:creationId xmlns:a16="http://schemas.microsoft.com/office/drawing/2014/main" id="{08574A0F-FBB2-4710-A2EE-40F5BD2DEAD1}"/>
               </a:ext>
             </a:extLst>
           </p:cNvPr>
@@ -13363,7 +13371,7 @@
           <p:cNvPr id="7" name="">
             <a:extLst xmlns:a="http://schemas.openxmlformats.org/drawingml/2006/main">
               <a:ext uri="{FF2B5EF4-FFF2-40B4-BE49-F238E27FC236}">
-                <a16:creationId xmlns:a16="http://schemas.microsoft.com/office/drawing/2014/main" id="{6094C254-D7E9-49C7-BBBF-56C4F27E65BF}"/>
+                <a16:creationId xmlns:a16="http://schemas.microsoft.com/office/drawing/2014/main" id="{BC5A9C72-3442-4090-86D9-4931A67CAD6A}"/>
               </a:ext>
             </a:extLst>
           </p:cNvPr>
@@ -13395,7 +13403,7 @@
           <p:cNvPr id="8" name="">
             <a:extLst xmlns:a="http://schemas.openxmlformats.org/drawingml/2006/main">
               <a:ext uri="{FF2B5EF4-FFF2-40B4-BE49-F238E27FC236}">
-                <a16:creationId xmlns:a16="http://schemas.microsoft.com/office/drawing/2014/main" id="{3D10A04D-7ADA-4751-AFFF-95B16E2151E9}"/>
+                <a16:creationId xmlns:a16="http://schemas.microsoft.com/office/drawing/2014/main" id="{0F18AEFB-9F8D-4493-866F-3A1BDA6E535F}"/>
               </a:ext>
             </a:extLst>
           </p:cNvPr>
@@ -13452,7 +13460,7 @@
           <p:cNvPr id="9" name="">
             <a:extLst xmlns:a="http://schemas.openxmlformats.org/drawingml/2006/main">
               <a:ext uri="{FF2B5EF4-FFF2-40B4-BE49-F238E27FC236}">
-                <a16:creationId xmlns:a16="http://schemas.microsoft.com/office/drawing/2014/main" id="{42641F78-1910-4BEA-8241-011FE4EFECCF}"/>
+                <a16:creationId xmlns:a16="http://schemas.microsoft.com/office/drawing/2014/main" id="{AE291295-1E06-44E1-A291-8926BF34D7E1}"/>
               </a:ext>
             </a:extLst>
           </p:cNvPr>
@@ -13509,7 +13517,7 @@
           <p:cNvPr id="10" name="">
             <a:extLst xmlns:a="http://schemas.openxmlformats.org/drawingml/2006/main">
               <a:ext uri="{FF2B5EF4-FFF2-40B4-BE49-F238E27FC236}">
-                <a16:creationId xmlns:a16="http://schemas.microsoft.com/office/drawing/2014/main" id="{D9ADF91B-C100-4AB5-B8AB-E8F82A3573DF}"/>
+                <a16:creationId xmlns:a16="http://schemas.microsoft.com/office/drawing/2014/main" id="{28E35D8E-3E05-44E7-AA21-27CD59AC26CD}"/>
               </a:ext>
             </a:extLst>
           </p:cNvPr>
@@ -13543,7 +13551,7 @@
           <p:cNvPr id="11" name="">
             <a:extLst xmlns:a="http://schemas.openxmlformats.org/drawingml/2006/main">
               <a:ext uri="{FF2B5EF4-FFF2-40B4-BE49-F238E27FC236}">
-                <a16:creationId xmlns:a16="http://schemas.microsoft.com/office/drawing/2014/main" id="{4621ED5B-E810-4B60-AA2E-96E11B8B4528}"/>
+                <a16:creationId xmlns:a16="http://schemas.microsoft.com/office/drawing/2014/main" id="{099B79C1-73E2-40BE-A69C-DA84C4271799}"/>
               </a:ext>
             </a:extLst>
           </p:cNvPr>
@@ -13575,7 +13583,7 @@
           <p:cNvPr id="12" name="">
             <a:extLst xmlns:a="http://schemas.openxmlformats.org/drawingml/2006/main">
               <a:ext uri="{FF2B5EF4-FFF2-40B4-BE49-F238E27FC236}">
-                <a16:creationId xmlns:a16="http://schemas.microsoft.com/office/drawing/2014/main" id="{E5F09D62-2C66-4838-9D9C-F9C7470161E4}"/>
+                <a16:creationId xmlns:a16="http://schemas.microsoft.com/office/drawing/2014/main" id="{5EDD6221-C4B8-40A5-B2CD-55F4DFC899F2}"/>
               </a:ext>
             </a:extLst>
           </p:cNvPr>
@@ -13632,7 +13640,7 @@
           <p:cNvPr id="13" name="">
             <a:extLst xmlns:a="http://schemas.openxmlformats.org/drawingml/2006/main">
               <a:ext uri="{FF2B5EF4-FFF2-40B4-BE49-F238E27FC236}">
-                <a16:creationId xmlns:a16="http://schemas.microsoft.com/office/drawing/2014/main" id="{3B5F9668-F655-4253-8C9B-CA46E67FC6FF}"/>
+                <a16:creationId xmlns:a16="http://schemas.microsoft.com/office/drawing/2014/main" id="{9F6A7252-BC9E-463F-BE7C-CFBCABBCDF7C}"/>
               </a:ext>
             </a:extLst>
           </p:cNvPr>
@@ -13689,7 +13697,7 @@
           <p:cNvPr id="14" name="">
             <a:extLst xmlns:a="http://schemas.openxmlformats.org/drawingml/2006/main">
               <a:ext uri="{FF2B5EF4-FFF2-40B4-BE49-F238E27FC236}">
-                <a16:creationId xmlns:a16="http://schemas.microsoft.com/office/drawing/2014/main" id="{0DD798C2-352E-4F74-9B17-00A8E55E9133}"/>
+                <a16:creationId xmlns:a16="http://schemas.microsoft.com/office/drawing/2014/main" id="{8179E05B-8B4F-4FB2-8183-E6BA5F2AEAEE}"/>
               </a:ext>
             </a:extLst>
           </p:cNvPr>
@@ -13723,7 +13731,7 @@
           <p:cNvPr id="15" name="">
             <a:extLst xmlns:a="http://schemas.openxmlformats.org/drawingml/2006/main">
               <a:ext uri="{FF2B5EF4-FFF2-40B4-BE49-F238E27FC236}">
-                <a16:creationId xmlns:a16="http://schemas.microsoft.com/office/drawing/2014/main" id="{63B212B4-DBFA-4DC0-9F38-0433713E0479}"/>
+                <a16:creationId xmlns:a16="http://schemas.microsoft.com/office/drawing/2014/main" id="{194BF5A3-E3D8-4600-925C-6ECD5635227B}"/>
               </a:ext>
             </a:extLst>
           </p:cNvPr>
@@ -13755,7 +13763,7 @@
           <p:cNvPr id="16" name="">
             <a:extLst xmlns:a="http://schemas.openxmlformats.org/drawingml/2006/main">
               <a:ext uri="{FF2B5EF4-FFF2-40B4-BE49-F238E27FC236}">
-                <a16:creationId xmlns:a16="http://schemas.microsoft.com/office/drawing/2014/main" id="{7C254B53-F110-46B1-9129-932C8E73F96C}"/>
+                <a16:creationId xmlns:a16="http://schemas.microsoft.com/office/drawing/2014/main" id="{A076E2C2-18F9-44BE-BD8B-FA97BDFB2D7A}"/>
               </a:ext>
             </a:extLst>
           </p:cNvPr>
@@ -13812,7 +13820,7 @@
           <p:cNvPr id="17" name="">
             <a:extLst xmlns:a="http://schemas.openxmlformats.org/drawingml/2006/main">
               <a:ext uri="{FF2B5EF4-FFF2-40B4-BE49-F238E27FC236}">
-                <a16:creationId xmlns:a16="http://schemas.microsoft.com/office/drawing/2014/main" id="{E2F9288C-9D6B-4D6E-84E0-C6B3D1FC0AF8}"/>
+                <a16:creationId xmlns:a16="http://schemas.microsoft.com/office/drawing/2014/main" id="{7E369A7F-E717-416E-A0DA-AD6448280D0F}"/>
               </a:ext>
             </a:extLst>
           </p:cNvPr>
@@ -13869,7 +13877,7 @@
           <p:cNvPr id="18" name="">
             <a:extLst xmlns:a="http://schemas.openxmlformats.org/drawingml/2006/main">
               <a:ext uri="{FF2B5EF4-FFF2-40B4-BE49-F238E27FC236}">
-                <a16:creationId xmlns:a16="http://schemas.microsoft.com/office/drawing/2014/main" id="{36D5F5D2-B9F2-4329-B892-9CB0076F635F}"/>
+                <a16:creationId xmlns:a16="http://schemas.microsoft.com/office/drawing/2014/main" id="{BBCBF352-702A-46EC-944B-A5FB843A306F}"/>
               </a:ext>
             </a:extLst>
           </p:cNvPr>
@@ -13903,7 +13911,7 @@
           <p:cNvPr id="19" name="">
             <a:extLst xmlns:a="http://schemas.openxmlformats.org/drawingml/2006/main">
               <a:ext uri="{FF2B5EF4-FFF2-40B4-BE49-F238E27FC236}">
-                <a16:creationId xmlns:a16="http://schemas.microsoft.com/office/drawing/2014/main" id="{6DA0A989-FE1A-4079-8D97-AFF659854ACB}"/>
+                <a16:creationId xmlns:a16="http://schemas.microsoft.com/office/drawing/2014/main" id="{1BA634F4-E74C-4ECD-8B17-B8F8BF621AB2}"/>
               </a:ext>
             </a:extLst>
           </p:cNvPr>
@@ -13935,7 +13943,7 @@
           <p:cNvPr id="20" name="">
             <a:extLst xmlns:a="http://schemas.openxmlformats.org/drawingml/2006/main">
               <a:ext uri="{FF2B5EF4-FFF2-40B4-BE49-F238E27FC236}">
-                <a16:creationId xmlns:a16="http://schemas.microsoft.com/office/drawing/2014/main" id="{4FB6E1A1-ACE1-4922-AB62-81D2DB867641}"/>
+                <a16:creationId xmlns:a16="http://schemas.microsoft.com/office/drawing/2014/main" id="{99FD3654-8827-4E0D-8887-686449BF9537}"/>
               </a:ext>
             </a:extLst>
           </p:cNvPr>
@@ -13992,7 +14000,7 @@
           <p:cNvPr id="21" name="">
             <a:extLst xmlns:a="http://schemas.openxmlformats.org/drawingml/2006/main">
               <a:ext uri="{FF2B5EF4-FFF2-40B4-BE49-F238E27FC236}">
-                <a16:creationId xmlns:a16="http://schemas.microsoft.com/office/drawing/2014/main" id="{55ACB36F-21C8-4057-9B15-066E43A49493}"/>
+                <a16:creationId xmlns:a16="http://schemas.microsoft.com/office/drawing/2014/main" id="{C8D9882E-E469-4212-9EB7-8408CB8FA0D6}"/>
               </a:ext>
             </a:extLst>
           </p:cNvPr>
@@ -14047,7 +14055,7 @@
     </p:spTree>
     <p:extLst>
       <p:ext uri="{BB962C8B-B14F-4D97-AF65-F5344CB8AC3E}">
-        <p14:creationId xmlns:p14="http://schemas.microsoft.com/office/powerpoint/2010/main" val="2028334192"/>
+        <p14:creationId xmlns:p14="http://schemas.microsoft.com/office/powerpoint/2010/main" val="881023816"/>
       </p:ext>
     </p:extLst>
   </p:cSld>
